--- a/Week4/NRP.pptx
+++ b/Week4/NRP.pptx
@@ -5,23 +5,23 @@
     <p:sldMasterId id="2147483648" r:id="rId1"/>
   </p:sldMasterIdLst>
   <p:sldIdLst>
-    <p:sldId id="256" r:id="rId7"/>
-    <p:sldId id="257" r:id="rId8"/>
-    <p:sldId id="258" r:id="rId9"/>
-    <p:sldId id="259" r:id="rId10"/>
-    <p:sldId id="260" r:id="rId11"/>
-    <p:sldId id="261" r:id="rId12"/>
-    <p:sldId id="262" r:id="rId13"/>
-    <p:sldId id="263" r:id="rId14"/>
-    <p:sldId id="264" r:id="rId15"/>
-    <p:sldId id="265" r:id="rId16"/>
-    <p:sldId id="266" r:id="rId17"/>
-    <p:sldId id="267" r:id="rId18"/>
-    <p:sldId id="268" r:id="rId19"/>
-    <p:sldId id="269" r:id="rId20"/>
-    <p:sldId id="270" r:id="rId21"/>
+    <p:sldId id="256" r:id="rId2"/>
+    <p:sldId id="257" r:id="rId3"/>
+    <p:sldId id="258" r:id="rId4"/>
+    <p:sldId id="259" r:id="rId5"/>
+    <p:sldId id="260" r:id="rId6"/>
+    <p:sldId id="261" r:id="rId7"/>
+    <p:sldId id="262" r:id="rId8"/>
+    <p:sldId id="263" r:id="rId9"/>
+    <p:sldId id="264" r:id="rId10"/>
+    <p:sldId id="265" r:id="rId11"/>
+    <p:sldId id="266" r:id="rId12"/>
+    <p:sldId id="267" r:id="rId13"/>
+    <p:sldId id="268" r:id="rId14"/>
+    <p:sldId id="269" r:id="rId15"/>
+    <p:sldId id="270" r:id="rId16"/>
   </p:sldIdLst>
-  <p:sldSz cx="12191695" cy="6858000" type="screen4x3"/>
+  <p:sldSz cx="12192000" cy="6858000"/>
   <p:notesSz cx="6858000" cy="9144000"/>
   <p:defaultTextStyle>
     <a:defPPr>
@@ -118,6 +118,22 @@
       </a:defRPr>
     </a:lvl9pPr>
   </p:defaultTextStyle>
+  <p:extLst>
+    <p:ext uri="{EFAFB233-063F-42B5-8137-9DF3F51BA10A}">
+      <p15:sldGuideLst xmlns:p15="http://schemas.microsoft.com/office/powerpoint/2012/main">
+        <p15:guide id="1" orient="horz" pos="2160">
+          <p15:clr>
+            <a:srgbClr val="A4A3A4"/>
+          </p15:clr>
+        </p15:guide>
+        <p15:guide id="2" pos="2880">
+          <p15:clr>
+            <a:srgbClr val="A4A3A4"/>
+          </p15:clr>
+        </p15:guide>
+      </p15:sldGuideLst>
+    </p:ext>
+  </p:extLst>
 </p:presentation>
 </file>
 
@@ -159,10 +175,9 @@
           <a:lstStyle/>
           <a:p>
             <a:r>
-              <a:rPr lang="en-US" smtClean="0"/>
+              <a:rPr lang="en-US"/>
               <a:t>Click to edit Master title style</a:t>
             </a:r>
-            <a:endParaRPr lang="en-US"/>
           </a:p>
         </p:txBody>
       </p:sp>
@@ -278,10 +293,9 @@
           </a:lstStyle>
           <a:p>
             <a:r>
-              <a:rPr lang="en-US" smtClean="0"/>
+              <a:rPr lang="en-US"/>
               <a:t>Click to edit Master subtitle style</a:t>
             </a:r>
-            <a:endParaRPr lang="en-US"/>
           </a:p>
         </p:txBody>
       </p:sp>
@@ -302,7 +316,7 @@
           <a:p>
             <a:fld id="{5BCAD085-E8A6-8845-BD4E-CB4CCA059FC4}" type="datetimeFigureOut">
               <a:rPr lang="en-US" smtClean="0"/>
-              <a:t>1/27/13</a:t>
+              <a:t>9/29/2026</a:t>
             </a:fld>
             <a:endParaRPr lang="en-US"/>
           </a:p>
@@ -360,6 +374,18 @@
   <p:clrMapOvr>
     <a:masterClrMapping/>
   </p:clrMapOvr>
+  <mc:AlternateContent xmlns:mc="http://schemas.openxmlformats.org/markup-compatibility/2006">
+    <mc:Choice xmlns:p159="http://schemas.microsoft.com/office/powerpoint/2015/09/main" Requires="p159">
+      <p:transition>
+        <p159:morph option="byObject"/>
+      </p:transition>
+    </mc:Choice>
+    <mc:Fallback>
+      <p:transition>
+        <p:fade/>
+      </p:transition>
+    </mc:Fallback>
+  </mc:AlternateContent>
 </p:sldLayout>
 </file>
 
@@ -396,10 +422,9 @@
           <a:lstStyle/>
           <a:p>
             <a:r>
-              <a:rPr lang="en-US" smtClean="0"/>
+              <a:rPr lang="en-US"/>
               <a:t>Click to edit Master title style</a:t>
             </a:r>
-            <a:endParaRPr lang="en-US"/>
           </a:p>
         </p:txBody>
       </p:sp>
@@ -420,38 +445,37 @@
           <a:p>
             <a:pPr lvl="0"/>
             <a:r>
-              <a:rPr lang="en-US" smtClean="0"/>
+              <a:rPr lang="en-US"/>
               <a:t>Click to edit Master text styles</a:t>
             </a:r>
           </a:p>
           <a:p>
             <a:pPr lvl="1"/>
             <a:r>
-              <a:rPr lang="en-US" smtClean="0"/>
+              <a:rPr lang="en-US"/>
               <a:t>Second level</a:t>
             </a:r>
           </a:p>
           <a:p>
             <a:pPr lvl="2"/>
             <a:r>
-              <a:rPr lang="en-US" smtClean="0"/>
+              <a:rPr lang="en-US"/>
               <a:t>Third level</a:t>
             </a:r>
           </a:p>
           <a:p>
             <a:pPr lvl="3"/>
             <a:r>
-              <a:rPr lang="en-US" smtClean="0"/>
+              <a:rPr lang="en-US"/>
               <a:t>Fourth level</a:t>
             </a:r>
           </a:p>
           <a:p>
             <a:pPr lvl="4"/>
             <a:r>
-              <a:rPr lang="en-US" smtClean="0"/>
+              <a:rPr lang="en-US"/>
               <a:t>Fifth level</a:t>
             </a:r>
-            <a:endParaRPr lang="en-US"/>
           </a:p>
         </p:txBody>
       </p:sp>
@@ -472,7 +496,7 @@
           <a:p>
             <a:fld id="{5BCAD085-E8A6-8845-BD4E-CB4CCA059FC4}" type="datetimeFigureOut">
               <a:rPr lang="en-US" smtClean="0"/>
-              <a:t>1/27/13</a:t>
+              <a:t>9/29/2026</a:t>
             </a:fld>
             <a:endParaRPr lang="en-US"/>
           </a:p>
@@ -530,6 +554,18 @@
   <p:clrMapOvr>
     <a:masterClrMapping/>
   </p:clrMapOvr>
+  <mc:AlternateContent xmlns:mc="http://schemas.openxmlformats.org/markup-compatibility/2006">
+    <mc:Choice xmlns:p159="http://schemas.microsoft.com/office/powerpoint/2015/09/main" Requires="p159">
+      <p:transition>
+        <p159:morph option="byObject"/>
+      </p:transition>
+    </mc:Choice>
+    <mc:Fallback>
+      <p:transition>
+        <p:fade/>
+      </p:transition>
+    </mc:Fallback>
+  </mc:AlternateContent>
 </p:sldLayout>
 </file>
 
@@ -571,10 +607,9 @@
           <a:lstStyle/>
           <a:p>
             <a:r>
-              <a:rPr lang="en-US" smtClean="0"/>
+              <a:rPr lang="en-US"/>
               <a:t>Click to edit Master title style</a:t>
             </a:r>
-            <a:endParaRPr lang="en-US"/>
           </a:p>
         </p:txBody>
       </p:sp>
@@ -600,38 +635,37 @@
           <a:p>
             <a:pPr lvl="0"/>
             <a:r>
-              <a:rPr lang="en-US" smtClean="0"/>
+              <a:rPr lang="en-US"/>
               <a:t>Click to edit Master text styles</a:t>
             </a:r>
           </a:p>
           <a:p>
             <a:pPr lvl="1"/>
             <a:r>
-              <a:rPr lang="en-US" smtClean="0"/>
+              <a:rPr lang="en-US"/>
               <a:t>Second level</a:t>
             </a:r>
           </a:p>
           <a:p>
             <a:pPr lvl="2"/>
             <a:r>
-              <a:rPr lang="en-US" smtClean="0"/>
+              <a:rPr lang="en-US"/>
               <a:t>Third level</a:t>
             </a:r>
           </a:p>
           <a:p>
             <a:pPr lvl="3"/>
             <a:r>
-              <a:rPr lang="en-US" smtClean="0"/>
+              <a:rPr lang="en-US"/>
               <a:t>Fourth level</a:t>
             </a:r>
           </a:p>
           <a:p>
             <a:pPr lvl="4"/>
             <a:r>
-              <a:rPr lang="en-US" smtClean="0"/>
+              <a:rPr lang="en-US"/>
               <a:t>Fifth level</a:t>
             </a:r>
-            <a:endParaRPr lang="en-US"/>
           </a:p>
         </p:txBody>
       </p:sp>
@@ -652,7 +686,7 @@
           <a:p>
             <a:fld id="{5BCAD085-E8A6-8845-BD4E-CB4CCA059FC4}" type="datetimeFigureOut">
               <a:rPr lang="en-US" smtClean="0"/>
-              <a:t>1/27/13</a:t>
+              <a:t>9/29/2026</a:t>
             </a:fld>
             <a:endParaRPr lang="en-US"/>
           </a:p>
@@ -710,6 +744,18 @@
   <p:clrMapOvr>
     <a:masterClrMapping/>
   </p:clrMapOvr>
+  <mc:AlternateContent xmlns:mc="http://schemas.openxmlformats.org/markup-compatibility/2006">
+    <mc:Choice xmlns:p159="http://schemas.microsoft.com/office/powerpoint/2015/09/main" Requires="p159">
+      <p:transition>
+        <p159:morph option="byObject"/>
+      </p:transition>
+    </mc:Choice>
+    <mc:Fallback>
+      <p:transition>
+        <p:fade/>
+      </p:transition>
+    </mc:Fallback>
+  </mc:AlternateContent>
 </p:sldLayout>
 </file>
 
@@ -746,10 +792,9 @@
           <a:lstStyle/>
           <a:p>
             <a:r>
-              <a:rPr lang="en-US" smtClean="0"/>
+              <a:rPr lang="en-US"/>
               <a:t>Click to edit Master title style</a:t>
             </a:r>
-            <a:endParaRPr lang="en-US"/>
           </a:p>
         </p:txBody>
       </p:sp>
@@ -770,38 +815,37 @@
           <a:p>
             <a:pPr lvl="0"/>
             <a:r>
-              <a:rPr lang="en-US" smtClean="0"/>
+              <a:rPr lang="en-US"/>
               <a:t>Click to edit Master text styles</a:t>
             </a:r>
           </a:p>
           <a:p>
             <a:pPr lvl="1"/>
             <a:r>
-              <a:rPr lang="en-US" smtClean="0"/>
+              <a:rPr lang="en-US"/>
               <a:t>Second level</a:t>
             </a:r>
           </a:p>
           <a:p>
             <a:pPr lvl="2"/>
             <a:r>
-              <a:rPr lang="en-US" smtClean="0"/>
+              <a:rPr lang="en-US"/>
               <a:t>Third level</a:t>
             </a:r>
           </a:p>
           <a:p>
             <a:pPr lvl="3"/>
             <a:r>
-              <a:rPr lang="en-US" smtClean="0"/>
+              <a:rPr lang="en-US"/>
               <a:t>Fourth level</a:t>
             </a:r>
           </a:p>
           <a:p>
             <a:pPr lvl="4"/>
             <a:r>
-              <a:rPr lang="en-US" smtClean="0"/>
+              <a:rPr lang="en-US"/>
               <a:t>Fifth level</a:t>
             </a:r>
-            <a:endParaRPr lang="en-US"/>
           </a:p>
         </p:txBody>
       </p:sp>
@@ -822,7 +866,7 @@
           <a:p>
             <a:fld id="{5BCAD085-E8A6-8845-BD4E-CB4CCA059FC4}" type="datetimeFigureOut">
               <a:rPr lang="en-US" smtClean="0"/>
-              <a:t>1/27/13</a:t>
+              <a:t>9/29/2026</a:t>
             </a:fld>
             <a:endParaRPr lang="en-US"/>
           </a:p>
@@ -880,6 +924,18 @@
   <p:clrMapOvr>
     <a:masterClrMapping/>
   </p:clrMapOvr>
+  <mc:AlternateContent xmlns:mc="http://schemas.openxmlformats.org/markup-compatibility/2006">
+    <mc:Choice xmlns:p159="http://schemas.microsoft.com/office/powerpoint/2015/09/main" Requires="p159">
+      <p:transition>
+        <p159:morph option="byObject"/>
+      </p:transition>
+    </mc:Choice>
+    <mc:Fallback>
+      <p:transition>
+        <p:fade/>
+      </p:transition>
+    </mc:Fallback>
+  </mc:AlternateContent>
 </p:sldLayout>
 </file>
 
@@ -925,10 +981,9 @@
           </a:lstStyle>
           <a:p>
             <a:r>
-              <a:rPr lang="en-US" smtClean="0"/>
+              <a:rPr lang="en-US"/>
               <a:t>Click to edit Master title style</a:t>
             </a:r>
-            <a:endParaRPr lang="en-US"/>
           </a:p>
         </p:txBody>
       </p:sp>
@@ -1045,7 +1100,7 @@
           <a:p>
             <a:pPr lvl="0"/>
             <a:r>
-              <a:rPr lang="en-US" smtClean="0"/>
+              <a:rPr lang="en-US"/>
               <a:t>Click to edit Master text styles</a:t>
             </a:r>
           </a:p>
@@ -1068,7 +1123,7 @@
           <a:p>
             <a:fld id="{5BCAD085-E8A6-8845-BD4E-CB4CCA059FC4}" type="datetimeFigureOut">
               <a:rPr lang="en-US" smtClean="0"/>
-              <a:t>1/27/13</a:t>
+              <a:t>9/29/2026</a:t>
             </a:fld>
             <a:endParaRPr lang="en-US"/>
           </a:p>
@@ -1126,6 +1181,18 @@
   <p:clrMapOvr>
     <a:masterClrMapping/>
   </p:clrMapOvr>
+  <mc:AlternateContent xmlns:mc="http://schemas.openxmlformats.org/markup-compatibility/2006">
+    <mc:Choice xmlns:p159="http://schemas.microsoft.com/office/powerpoint/2015/09/main" Requires="p159">
+      <p:transition>
+        <p159:morph option="byObject"/>
+      </p:transition>
+    </mc:Choice>
+    <mc:Fallback>
+      <p:transition>
+        <p:fade/>
+      </p:transition>
+    </mc:Fallback>
+  </mc:AlternateContent>
 </p:sldLayout>
 </file>
 
@@ -1162,10 +1229,9 @@
           <a:lstStyle/>
           <a:p>
             <a:r>
-              <a:rPr lang="en-US" smtClean="0"/>
+              <a:rPr lang="en-US"/>
               <a:t>Click to edit Master title style</a:t>
             </a:r>
-            <a:endParaRPr lang="en-US"/>
           </a:p>
         </p:txBody>
       </p:sp>
@@ -1219,38 +1285,37 @@
           <a:p>
             <a:pPr lvl="0"/>
             <a:r>
-              <a:rPr lang="en-US" smtClean="0"/>
+              <a:rPr lang="en-US"/>
               <a:t>Click to edit Master text styles</a:t>
             </a:r>
           </a:p>
           <a:p>
             <a:pPr lvl="1"/>
             <a:r>
-              <a:rPr lang="en-US" smtClean="0"/>
+              <a:rPr lang="en-US"/>
               <a:t>Second level</a:t>
             </a:r>
           </a:p>
           <a:p>
             <a:pPr lvl="2"/>
             <a:r>
-              <a:rPr lang="en-US" smtClean="0"/>
+              <a:rPr lang="en-US"/>
               <a:t>Third level</a:t>
             </a:r>
           </a:p>
           <a:p>
             <a:pPr lvl="3"/>
             <a:r>
-              <a:rPr lang="en-US" smtClean="0"/>
+              <a:rPr lang="en-US"/>
               <a:t>Fourth level</a:t>
             </a:r>
           </a:p>
           <a:p>
             <a:pPr lvl="4"/>
             <a:r>
-              <a:rPr lang="en-US" smtClean="0"/>
+              <a:rPr lang="en-US"/>
               <a:t>Fifth level</a:t>
             </a:r>
-            <a:endParaRPr lang="en-US"/>
           </a:p>
         </p:txBody>
       </p:sp>
@@ -1304,38 +1369,37 @@
           <a:p>
             <a:pPr lvl="0"/>
             <a:r>
-              <a:rPr lang="en-US" smtClean="0"/>
+              <a:rPr lang="en-US"/>
               <a:t>Click to edit Master text styles</a:t>
             </a:r>
           </a:p>
           <a:p>
             <a:pPr lvl="1"/>
             <a:r>
-              <a:rPr lang="en-US" smtClean="0"/>
+              <a:rPr lang="en-US"/>
               <a:t>Second level</a:t>
             </a:r>
           </a:p>
           <a:p>
             <a:pPr lvl="2"/>
             <a:r>
-              <a:rPr lang="en-US" smtClean="0"/>
+              <a:rPr lang="en-US"/>
               <a:t>Third level</a:t>
             </a:r>
           </a:p>
           <a:p>
             <a:pPr lvl="3"/>
             <a:r>
-              <a:rPr lang="en-US" smtClean="0"/>
+              <a:rPr lang="en-US"/>
               <a:t>Fourth level</a:t>
             </a:r>
           </a:p>
           <a:p>
             <a:pPr lvl="4"/>
             <a:r>
-              <a:rPr lang="en-US" smtClean="0"/>
+              <a:rPr lang="en-US"/>
               <a:t>Fifth level</a:t>
             </a:r>
-            <a:endParaRPr lang="en-US"/>
           </a:p>
         </p:txBody>
       </p:sp>
@@ -1356,7 +1420,7 @@
           <a:p>
             <a:fld id="{5BCAD085-E8A6-8845-BD4E-CB4CCA059FC4}" type="datetimeFigureOut">
               <a:rPr lang="en-US" smtClean="0"/>
-              <a:t>1/27/13</a:t>
+              <a:t>9/29/2026</a:t>
             </a:fld>
             <a:endParaRPr lang="en-US"/>
           </a:p>
@@ -1414,6 +1478,18 @@
   <p:clrMapOvr>
     <a:masterClrMapping/>
   </p:clrMapOvr>
+  <mc:AlternateContent xmlns:mc="http://schemas.openxmlformats.org/markup-compatibility/2006">
+    <mc:Choice xmlns:p159="http://schemas.microsoft.com/office/powerpoint/2015/09/main" Requires="p159">
+      <p:transition>
+        <p159:morph option="byObject"/>
+      </p:transition>
+    </mc:Choice>
+    <mc:Fallback>
+      <p:transition>
+        <p:fade/>
+      </p:transition>
+    </mc:Fallback>
+  </mc:AlternateContent>
 </p:sldLayout>
 </file>
 
@@ -1454,10 +1530,9 @@
           </a:lstStyle>
           <a:p>
             <a:r>
-              <a:rPr lang="en-US" smtClean="0"/>
+              <a:rPr lang="en-US"/>
               <a:t>Click to edit Master title style</a:t>
             </a:r>
-            <a:endParaRPr lang="en-US"/>
           </a:p>
         </p:txBody>
       </p:sp>
@@ -1520,7 +1595,7 @@
           <a:p>
             <a:pPr lvl="0"/>
             <a:r>
-              <a:rPr lang="en-US" smtClean="0"/>
+              <a:rPr lang="en-US"/>
               <a:t>Click to edit Master text styles</a:t>
             </a:r>
           </a:p>
@@ -1576,38 +1651,37 @@
           <a:p>
             <a:pPr lvl="0"/>
             <a:r>
-              <a:rPr lang="en-US" smtClean="0"/>
+              <a:rPr lang="en-US"/>
               <a:t>Click to edit Master text styles</a:t>
             </a:r>
           </a:p>
           <a:p>
             <a:pPr lvl="1"/>
             <a:r>
-              <a:rPr lang="en-US" smtClean="0"/>
+              <a:rPr lang="en-US"/>
               <a:t>Second level</a:t>
             </a:r>
           </a:p>
           <a:p>
             <a:pPr lvl="2"/>
             <a:r>
-              <a:rPr lang="en-US" smtClean="0"/>
+              <a:rPr lang="en-US"/>
               <a:t>Third level</a:t>
             </a:r>
           </a:p>
           <a:p>
             <a:pPr lvl="3"/>
             <a:r>
-              <a:rPr lang="en-US" smtClean="0"/>
+              <a:rPr lang="en-US"/>
               <a:t>Fourth level</a:t>
             </a:r>
           </a:p>
           <a:p>
             <a:pPr lvl="4"/>
             <a:r>
-              <a:rPr lang="en-US" smtClean="0"/>
+              <a:rPr lang="en-US"/>
               <a:t>Fifth level</a:t>
             </a:r>
-            <a:endParaRPr lang="en-US"/>
           </a:p>
         </p:txBody>
       </p:sp>
@@ -1670,7 +1744,7 @@
           <a:p>
             <a:pPr lvl="0"/>
             <a:r>
-              <a:rPr lang="en-US" smtClean="0"/>
+              <a:rPr lang="en-US"/>
               <a:t>Click to edit Master text styles</a:t>
             </a:r>
           </a:p>
@@ -1726,38 +1800,37 @@
           <a:p>
             <a:pPr lvl="0"/>
             <a:r>
-              <a:rPr lang="en-US" smtClean="0"/>
+              <a:rPr lang="en-US"/>
               <a:t>Click to edit Master text styles</a:t>
             </a:r>
           </a:p>
           <a:p>
             <a:pPr lvl="1"/>
             <a:r>
-              <a:rPr lang="en-US" smtClean="0"/>
+              <a:rPr lang="en-US"/>
               <a:t>Second level</a:t>
             </a:r>
           </a:p>
           <a:p>
             <a:pPr lvl="2"/>
             <a:r>
-              <a:rPr lang="en-US" smtClean="0"/>
+              <a:rPr lang="en-US"/>
               <a:t>Third level</a:t>
             </a:r>
           </a:p>
           <a:p>
             <a:pPr lvl="3"/>
             <a:r>
-              <a:rPr lang="en-US" smtClean="0"/>
+              <a:rPr lang="en-US"/>
               <a:t>Fourth level</a:t>
             </a:r>
           </a:p>
           <a:p>
             <a:pPr lvl="4"/>
             <a:r>
-              <a:rPr lang="en-US" smtClean="0"/>
+              <a:rPr lang="en-US"/>
               <a:t>Fifth level</a:t>
             </a:r>
-            <a:endParaRPr lang="en-US"/>
           </a:p>
         </p:txBody>
       </p:sp>
@@ -1778,7 +1851,7 @@
           <a:p>
             <a:fld id="{5BCAD085-E8A6-8845-BD4E-CB4CCA059FC4}" type="datetimeFigureOut">
               <a:rPr lang="en-US" smtClean="0"/>
-              <a:t>1/27/13</a:t>
+              <a:t>9/29/2026</a:t>
             </a:fld>
             <a:endParaRPr lang="en-US"/>
           </a:p>
@@ -1836,6 +1909,18 @@
   <p:clrMapOvr>
     <a:masterClrMapping/>
   </p:clrMapOvr>
+  <mc:AlternateContent xmlns:mc="http://schemas.openxmlformats.org/markup-compatibility/2006">
+    <mc:Choice xmlns:p159="http://schemas.microsoft.com/office/powerpoint/2015/09/main" Requires="p159">
+      <p:transition>
+        <p159:morph option="byObject"/>
+      </p:transition>
+    </mc:Choice>
+    <mc:Fallback>
+      <p:transition>
+        <p:fade/>
+      </p:transition>
+    </mc:Fallback>
+  </mc:AlternateContent>
 </p:sldLayout>
 </file>
 
@@ -1872,10 +1957,9 @@
           <a:lstStyle/>
           <a:p>
             <a:r>
-              <a:rPr lang="en-US" smtClean="0"/>
+              <a:rPr lang="en-US"/>
               <a:t>Click to edit Master title style</a:t>
             </a:r>
-            <a:endParaRPr lang="en-US"/>
           </a:p>
         </p:txBody>
       </p:sp>
@@ -1896,7 +1980,7 @@
           <a:p>
             <a:fld id="{5BCAD085-E8A6-8845-BD4E-CB4CCA059FC4}" type="datetimeFigureOut">
               <a:rPr lang="en-US" smtClean="0"/>
-              <a:t>1/27/13</a:t>
+              <a:t>9/29/2026</a:t>
             </a:fld>
             <a:endParaRPr lang="en-US"/>
           </a:p>
@@ -1954,6 +2038,18 @@
   <p:clrMapOvr>
     <a:masterClrMapping/>
   </p:clrMapOvr>
+  <mc:AlternateContent xmlns:mc="http://schemas.openxmlformats.org/markup-compatibility/2006">
+    <mc:Choice xmlns:p159="http://schemas.microsoft.com/office/powerpoint/2015/09/main" Requires="p159">
+      <p:transition>
+        <p159:morph option="byObject"/>
+      </p:transition>
+    </mc:Choice>
+    <mc:Fallback>
+      <p:transition>
+        <p:fade/>
+      </p:transition>
+    </mc:Fallback>
+  </mc:AlternateContent>
 </p:sldLayout>
 </file>
 
@@ -1991,7 +2087,7 @@
           <a:p>
             <a:fld id="{5BCAD085-E8A6-8845-BD4E-CB4CCA059FC4}" type="datetimeFigureOut">
               <a:rPr lang="en-US" smtClean="0"/>
-              <a:t>1/27/13</a:t>
+              <a:t>9/29/2026</a:t>
             </a:fld>
             <a:endParaRPr lang="en-US"/>
           </a:p>
@@ -2049,6 +2145,18 @@
   <p:clrMapOvr>
     <a:masterClrMapping/>
   </p:clrMapOvr>
+  <mc:AlternateContent xmlns:mc="http://schemas.openxmlformats.org/markup-compatibility/2006">
+    <mc:Choice xmlns:p159="http://schemas.microsoft.com/office/powerpoint/2015/09/main" Requires="p159">
+      <p:transition>
+        <p159:morph option="byObject"/>
+      </p:transition>
+    </mc:Choice>
+    <mc:Fallback>
+      <p:transition>
+        <p:fade/>
+      </p:transition>
+    </mc:Fallback>
+  </mc:AlternateContent>
 </p:sldLayout>
 </file>
 
@@ -2094,10 +2202,9 @@
           </a:lstStyle>
           <a:p>
             <a:r>
-              <a:rPr lang="en-US" smtClean="0"/>
+              <a:rPr lang="en-US"/>
               <a:t>Click to edit Master title style</a:t>
             </a:r>
-            <a:endParaRPr lang="en-US"/>
           </a:p>
         </p:txBody>
       </p:sp>
@@ -2151,38 +2258,37 @@
           <a:p>
             <a:pPr lvl="0"/>
             <a:r>
-              <a:rPr lang="en-US" smtClean="0"/>
+              <a:rPr lang="en-US"/>
               <a:t>Click to edit Master text styles</a:t>
             </a:r>
           </a:p>
           <a:p>
             <a:pPr lvl="1"/>
             <a:r>
-              <a:rPr lang="en-US" smtClean="0"/>
+              <a:rPr lang="en-US"/>
               <a:t>Second level</a:t>
             </a:r>
           </a:p>
           <a:p>
             <a:pPr lvl="2"/>
             <a:r>
-              <a:rPr lang="en-US" smtClean="0"/>
+              <a:rPr lang="en-US"/>
               <a:t>Third level</a:t>
             </a:r>
           </a:p>
           <a:p>
             <a:pPr lvl="3"/>
             <a:r>
-              <a:rPr lang="en-US" smtClean="0"/>
+              <a:rPr lang="en-US"/>
               <a:t>Fourth level</a:t>
             </a:r>
           </a:p>
           <a:p>
             <a:pPr lvl="4"/>
             <a:r>
-              <a:rPr lang="en-US" smtClean="0"/>
+              <a:rPr lang="en-US"/>
               <a:t>Fifth level</a:t>
             </a:r>
-            <a:endParaRPr lang="en-US"/>
           </a:p>
         </p:txBody>
       </p:sp>
@@ -2245,7 +2351,7 @@
           <a:p>
             <a:pPr lvl="0"/>
             <a:r>
-              <a:rPr lang="en-US" smtClean="0"/>
+              <a:rPr lang="en-US"/>
               <a:t>Click to edit Master text styles</a:t>
             </a:r>
           </a:p>
@@ -2268,7 +2374,7 @@
           <a:p>
             <a:fld id="{5BCAD085-E8A6-8845-BD4E-CB4CCA059FC4}" type="datetimeFigureOut">
               <a:rPr lang="en-US" smtClean="0"/>
-              <a:t>1/27/13</a:t>
+              <a:t>9/29/2026</a:t>
             </a:fld>
             <a:endParaRPr lang="en-US"/>
           </a:p>
@@ -2326,6 +2432,18 @@
   <p:clrMapOvr>
     <a:masterClrMapping/>
   </p:clrMapOvr>
+  <mc:AlternateContent xmlns:mc="http://schemas.openxmlformats.org/markup-compatibility/2006">
+    <mc:Choice xmlns:p159="http://schemas.microsoft.com/office/powerpoint/2015/09/main" Requires="p159">
+      <p:transition>
+        <p159:morph option="byObject"/>
+      </p:transition>
+    </mc:Choice>
+    <mc:Fallback>
+      <p:transition>
+        <p:fade/>
+      </p:transition>
+    </mc:Fallback>
+  </mc:AlternateContent>
 </p:sldLayout>
 </file>
 
@@ -2371,10 +2489,9 @@
           </a:lstStyle>
           <a:p>
             <a:r>
-              <a:rPr lang="en-US" smtClean="0"/>
+              <a:rPr lang="en-US"/>
               <a:t>Click to edit Master title style</a:t>
             </a:r>
-            <a:endParaRPr lang="en-US"/>
           </a:p>
         </p:txBody>
       </p:sp>
@@ -2498,7 +2615,7 @@
           <a:p>
             <a:pPr lvl="0"/>
             <a:r>
-              <a:rPr lang="en-US" smtClean="0"/>
+              <a:rPr lang="en-US"/>
               <a:t>Click to edit Master text styles</a:t>
             </a:r>
           </a:p>
@@ -2521,7 +2638,7 @@
           <a:p>
             <a:fld id="{5BCAD085-E8A6-8845-BD4E-CB4CCA059FC4}" type="datetimeFigureOut">
               <a:rPr lang="en-US" smtClean="0"/>
-              <a:t>1/27/13</a:t>
+              <a:t>9/29/2026</a:t>
             </a:fld>
             <a:endParaRPr lang="en-US"/>
           </a:p>
@@ -2579,6 +2696,18 @@
   <p:clrMapOvr>
     <a:masterClrMapping/>
   </p:clrMapOvr>
+  <mc:AlternateContent xmlns:mc="http://schemas.openxmlformats.org/markup-compatibility/2006">
+    <mc:Choice xmlns:p159="http://schemas.microsoft.com/office/powerpoint/2015/09/main" Requires="p159">
+      <p:transition>
+        <p159:morph option="byObject"/>
+      </p:transition>
+    </mc:Choice>
+    <mc:Fallback>
+      <p:transition>
+        <p:fade/>
+      </p:transition>
+    </mc:Fallback>
+  </mc:AlternateContent>
 </p:sldLayout>
 </file>
 
@@ -2630,10 +2759,9 @@
           <a:lstStyle/>
           <a:p>
             <a:r>
-              <a:rPr lang="en-US" smtClean="0"/>
+              <a:rPr lang="en-US"/>
               <a:t>Click to edit Master title style</a:t>
             </a:r>
-            <a:endParaRPr lang="en-US"/>
           </a:p>
         </p:txBody>
       </p:sp>
@@ -2664,38 +2792,37 @@
           <a:p>
             <a:pPr lvl="0"/>
             <a:r>
-              <a:rPr lang="en-US" smtClean="0"/>
+              <a:rPr lang="en-US"/>
               <a:t>Click to edit Master text styles</a:t>
             </a:r>
           </a:p>
           <a:p>
             <a:pPr lvl="1"/>
             <a:r>
-              <a:rPr lang="en-US" smtClean="0"/>
+              <a:rPr lang="en-US"/>
               <a:t>Second level</a:t>
             </a:r>
           </a:p>
           <a:p>
             <a:pPr lvl="2"/>
             <a:r>
-              <a:rPr lang="en-US" smtClean="0"/>
+              <a:rPr lang="en-US"/>
               <a:t>Third level</a:t>
             </a:r>
           </a:p>
           <a:p>
             <a:pPr lvl="3"/>
             <a:r>
-              <a:rPr lang="en-US" smtClean="0"/>
+              <a:rPr lang="en-US"/>
               <a:t>Fourth level</a:t>
             </a:r>
           </a:p>
           <a:p>
             <a:pPr lvl="4"/>
             <a:r>
-              <a:rPr lang="en-US" smtClean="0"/>
+              <a:rPr lang="en-US"/>
               <a:t>Fifth level</a:t>
             </a:r>
-            <a:endParaRPr lang="en-US"/>
           </a:p>
         </p:txBody>
       </p:sp>
@@ -2734,7 +2861,7 @@
           <a:p>
             <a:fld id="{5BCAD085-E8A6-8845-BD4E-CB4CCA059FC4}" type="datetimeFigureOut">
               <a:rPr lang="en-US" smtClean="0"/>
-              <a:t>1/27/13</a:t>
+              <a:t>9/29/2026</a:t>
             </a:fld>
             <a:endParaRPr lang="en-US"/>
           </a:p>
@@ -2839,6 +2966,18 @@
     <p:sldLayoutId id="2147483658" r:id="rId10"/>
     <p:sldLayoutId id="2147483659" r:id="rId11"/>
   </p:sldLayoutIdLst>
+  <mc:AlternateContent xmlns:mc="http://schemas.openxmlformats.org/markup-compatibility/2006">
+    <mc:Choice xmlns:p159="http://schemas.microsoft.com/office/powerpoint/2015/09/main" Requires="p159">
+      <p:transition>
+        <p159:morph option="byObject"/>
+      </p:transition>
+    </mc:Choice>
+    <mc:Fallback>
+      <p:transition>
+        <p:fade/>
+      </p:transition>
+    </mc:Fallback>
+  </mc:AlternateContent>
   <p:txStyles>
     <p:titleStyle>
       <a:lvl1pPr algn="ctr" defTabSz="457200" rtl="0" eaLnBrk="1" latinLnBrk="0" hangingPunct="1">
@@ -3093,7 +3232,7 @@
 </file>
 
 <file path=ppt/slides/slide1.xml><?xml version="1.0" encoding="utf-8"?>
-<p:sld xmlns:a="http://schemas.openxmlformats.org/drawingml/2006/main" xmlns:p="http://schemas.openxmlformats.org/presentationml/2006/main" xmlns:r="http://schemas.openxmlformats.org/officeDocument/2006/relationships">
+<p:sld xmlns:a="http://schemas.openxmlformats.org/drawingml/2006/main" xmlns:r="http://schemas.openxmlformats.org/officeDocument/2006/relationships" xmlns:p="http://schemas.openxmlformats.org/presentationml/2006/main">
   <p:cSld>
     <p:bg>
       <p:bgPr>
@@ -3109,7 +3248,14 @@
         <p:cNvGrpSpPr/>
         <p:nvPr/>
       </p:nvGrpSpPr>
-      <p:grpSpPr/>
+      <p:grpSpPr>
+        <a:xfrm>
+          <a:off x="0" y="0"/>
+          <a:ext cx="0" cy="0"/>
+          <a:chOff x="0" y="0"/>
+          <a:chExt cx="0" cy="0"/>
+        </a:xfrm>
+      </p:grpSpPr>
       <p:sp>
         <p:nvSpPr>
           <p:cNvPr id="2" name="Rectangle 1"/>
@@ -3150,6 +3296,7 @@
           <a:lstStyle/>
           <a:p>
             <a:pPr algn="ctr"/>
+            <a:endParaRPr/>
           </a:p>
         </p:txBody>
       </p:sp>
@@ -3302,11 +3449,23 @@
   <p:clrMapOvr>
     <a:masterClrMapping/>
   </p:clrMapOvr>
+  <mc:AlternateContent xmlns:mc="http://schemas.openxmlformats.org/markup-compatibility/2006">
+    <mc:Choice xmlns:p159="http://schemas.microsoft.com/office/powerpoint/2015/09/main" Requires="p159">
+      <p:transition>
+        <p159:morph option="byObject"/>
+      </p:transition>
+    </mc:Choice>
+    <mc:Fallback>
+      <p:transition>
+        <p:fade/>
+      </p:transition>
+    </mc:Fallback>
+  </mc:AlternateContent>
 </p:sld>
 </file>
 
 <file path=ppt/slides/slide10.xml><?xml version="1.0" encoding="utf-8"?>
-<p:sld xmlns:a="http://schemas.openxmlformats.org/drawingml/2006/main" xmlns:p="http://schemas.openxmlformats.org/presentationml/2006/main" xmlns:r="http://schemas.openxmlformats.org/officeDocument/2006/relationships">
+<p:sld xmlns:a="http://schemas.openxmlformats.org/drawingml/2006/main" xmlns:r="http://schemas.openxmlformats.org/officeDocument/2006/relationships" xmlns:p="http://schemas.openxmlformats.org/presentationml/2006/main">
   <p:cSld>
     <p:bg>
       <p:bgPr>
@@ -3322,7 +3481,14 @@
         <p:cNvGrpSpPr/>
         <p:nvPr/>
       </p:nvGrpSpPr>
-      <p:grpSpPr/>
+      <p:grpSpPr>
+        <a:xfrm>
+          <a:off x="0" y="0"/>
+          <a:ext cx="0" cy="0"/>
+          <a:chOff x="0" y="0"/>
+          <a:chExt cx="0" cy="0"/>
+        </a:xfrm>
+      </p:grpSpPr>
       <p:sp>
         <p:nvSpPr>
           <p:cNvPr id="2" name="Rectangle 1"/>
@@ -3363,6 +3529,7 @@
           <a:lstStyle/>
           <a:p>
             <a:pPr algn="ctr"/>
+            <a:endParaRPr/>
           </a:p>
         </p:txBody>
       </p:sp>
@@ -3981,6 +4148,7 @@
           <a:lstStyle/>
           <a:p>
             <a:pPr algn="ctr"/>
+            <a:endParaRPr/>
           </a:p>
         </p:txBody>
       </p:sp>
@@ -4024,6 +4192,7 @@
           <a:lstStyle/>
           <a:p>
             <a:pPr algn="ctr"/>
+            <a:endParaRPr/>
           </a:p>
         </p:txBody>
       </p:sp>
@@ -4140,11 +4309,23 @@
   <p:clrMapOvr>
     <a:masterClrMapping/>
   </p:clrMapOvr>
+  <mc:AlternateContent xmlns:mc="http://schemas.openxmlformats.org/markup-compatibility/2006">
+    <mc:Choice xmlns:p159="http://schemas.microsoft.com/office/powerpoint/2015/09/main" Requires="p159">
+      <p:transition>
+        <p159:morph option="byObject"/>
+      </p:transition>
+    </mc:Choice>
+    <mc:Fallback>
+      <p:transition>
+        <p:fade/>
+      </p:transition>
+    </mc:Fallback>
+  </mc:AlternateContent>
 </p:sld>
 </file>
 
 <file path=ppt/slides/slide11.xml><?xml version="1.0" encoding="utf-8"?>
-<p:sld xmlns:a="http://schemas.openxmlformats.org/drawingml/2006/main" xmlns:p="http://schemas.openxmlformats.org/presentationml/2006/main" xmlns:r="http://schemas.openxmlformats.org/officeDocument/2006/relationships">
+<p:sld xmlns:a="http://schemas.openxmlformats.org/drawingml/2006/main" xmlns:r="http://schemas.openxmlformats.org/officeDocument/2006/relationships" xmlns:p="http://schemas.openxmlformats.org/presentationml/2006/main">
   <p:cSld>
     <p:bg>
       <p:bgPr>
@@ -4160,7 +4341,14 @@
         <p:cNvGrpSpPr/>
         <p:nvPr/>
       </p:nvGrpSpPr>
-      <p:grpSpPr/>
+      <p:grpSpPr>
+        <a:xfrm>
+          <a:off x="0" y="0"/>
+          <a:ext cx="0" cy="0"/>
+          <a:chOff x="0" y="0"/>
+          <a:chExt cx="0" cy="0"/>
+        </a:xfrm>
+      </p:grpSpPr>
       <p:sp>
         <p:nvSpPr>
           <p:cNvPr id="2" name="Rectangle 1"/>
@@ -4201,6 +4389,7 @@
           <a:lstStyle/>
           <a:p>
             <a:pPr algn="ctr"/>
+            <a:endParaRPr/>
           </a:p>
         </p:txBody>
       </p:sp>
@@ -4316,6 +4505,7 @@
           <a:lstStyle/>
           <a:p>
             <a:pPr algn="ctr"/>
+            <a:endParaRPr/>
           </a:p>
         </p:txBody>
       </p:sp>
@@ -4359,6 +4549,7 @@
           <a:lstStyle/>
           <a:p>
             <a:pPr algn="ctr"/>
+            <a:endParaRPr/>
           </a:p>
         </p:txBody>
       </p:sp>
@@ -4873,6 +5064,7 @@
           <a:lstStyle/>
           <a:p>
             <a:pPr algn="ctr"/>
+            <a:endParaRPr/>
           </a:p>
         </p:txBody>
       </p:sp>
@@ -4916,6 +5108,7 @@
           <a:lstStyle/>
           <a:p>
             <a:pPr algn="ctr"/>
+            <a:endParaRPr/>
           </a:p>
         </p:txBody>
       </p:sp>
@@ -5032,11 +5225,23 @@
   <p:clrMapOvr>
     <a:masterClrMapping/>
   </p:clrMapOvr>
+  <mc:AlternateContent xmlns:mc="http://schemas.openxmlformats.org/markup-compatibility/2006">
+    <mc:Choice xmlns:p159="http://schemas.microsoft.com/office/powerpoint/2015/09/main" Requires="p159">
+      <p:transition>
+        <p159:morph option="byObject"/>
+      </p:transition>
+    </mc:Choice>
+    <mc:Fallback>
+      <p:transition>
+        <p:fade/>
+      </p:transition>
+    </mc:Fallback>
+  </mc:AlternateContent>
 </p:sld>
 </file>
 
 <file path=ppt/slides/slide12.xml><?xml version="1.0" encoding="utf-8"?>
-<p:sld xmlns:a="http://schemas.openxmlformats.org/drawingml/2006/main" xmlns:p="http://schemas.openxmlformats.org/presentationml/2006/main" xmlns:r="http://schemas.openxmlformats.org/officeDocument/2006/relationships">
+<p:sld xmlns:a="http://schemas.openxmlformats.org/drawingml/2006/main" xmlns:r="http://schemas.openxmlformats.org/officeDocument/2006/relationships" xmlns:p="http://schemas.openxmlformats.org/presentationml/2006/main">
   <p:cSld>
     <p:bg>
       <p:bgPr>
@@ -5052,7 +5257,14 @@
         <p:cNvGrpSpPr/>
         <p:nvPr/>
       </p:nvGrpSpPr>
-      <p:grpSpPr/>
+      <p:grpSpPr>
+        <a:xfrm>
+          <a:off x="0" y="0"/>
+          <a:ext cx="0" cy="0"/>
+          <a:chOff x="0" y="0"/>
+          <a:chExt cx="0" cy="0"/>
+        </a:xfrm>
+      </p:grpSpPr>
       <p:sp>
         <p:nvSpPr>
           <p:cNvPr id="2" name="Rectangle 1"/>
@@ -5093,6 +5305,7 @@
           <a:lstStyle/>
           <a:p>
             <a:pPr algn="ctr"/>
+            <a:endParaRPr/>
           </a:p>
         </p:txBody>
       </p:sp>
@@ -5173,6 +5386,7 @@
           <a:lstStyle/>
           <a:p>
             <a:pPr algn="ctr"/>
+            <a:endParaRPr/>
           </a:p>
         </p:txBody>
       </p:sp>
@@ -5216,6 +5430,7 @@
           <a:lstStyle/>
           <a:p>
             <a:pPr algn="ctr"/>
+            <a:endParaRPr/>
           </a:p>
         </p:txBody>
       </p:sp>
@@ -5439,6 +5654,7 @@
           <a:lstStyle/>
           <a:p>
             <a:pPr algn="ctr"/>
+            <a:endParaRPr/>
           </a:p>
         </p:txBody>
       </p:sp>
@@ -5482,6 +5698,7 @@
           <a:lstStyle/>
           <a:p>
             <a:pPr algn="ctr"/>
+            <a:endParaRPr/>
           </a:p>
         </p:txBody>
       </p:sp>
@@ -5613,11 +5830,23 @@
   <p:clrMapOvr>
     <a:masterClrMapping/>
   </p:clrMapOvr>
+  <mc:AlternateContent xmlns:mc="http://schemas.openxmlformats.org/markup-compatibility/2006">
+    <mc:Choice xmlns:p159="http://schemas.microsoft.com/office/powerpoint/2015/09/main" Requires="p159">
+      <p:transition>
+        <p159:morph option="byObject"/>
+      </p:transition>
+    </mc:Choice>
+    <mc:Fallback>
+      <p:transition>
+        <p:fade/>
+      </p:transition>
+    </mc:Fallback>
+  </mc:AlternateContent>
 </p:sld>
 </file>
 
 <file path=ppt/slides/slide13.xml><?xml version="1.0" encoding="utf-8"?>
-<p:sld xmlns:a="http://schemas.openxmlformats.org/drawingml/2006/main" xmlns:p="http://schemas.openxmlformats.org/presentationml/2006/main" xmlns:r="http://schemas.openxmlformats.org/officeDocument/2006/relationships">
+<p:sld xmlns:a="http://schemas.openxmlformats.org/drawingml/2006/main" xmlns:r="http://schemas.openxmlformats.org/officeDocument/2006/relationships" xmlns:p="http://schemas.openxmlformats.org/presentationml/2006/main">
   <p:cSld>
     <p:bg>
       <p:bgPr>
@@ -5633,7 +5862,14 @@
         <p:cNvGrpSpPr/>
         <p:nvPr/>
       </p:nvGrpSpPr>
-      <p:grpSpPr/>
+      <p:grpSpPr>
+        <a:xfrm>
+          <a:off x="0" y="0"/>
+          <a:ext cx="0" cy="0"/>
+          <a:chOff x="0" y="0"/>
+          <a:chExt cx="0" cy="0"/>
+        </a:xfrm>
+      </p:grpSpPr>
       <p:sp>
         <p:nvSpPr>
           <p:cNvPr id="2" name="Rectangle 1"/>
@@ -5674,6 +5910,7 @@
           <a:lstStyle/>
           <a:p>
             <a:pPr algn="ctr"/>
+            <a:endParaRPr/>
           </a:p>
         </p:txBody>
       </p:sp>
@@ -5754,6 +5991,7 @@
           <a:lstStyle/>
           <a:p>
             <a:pPr algn="ctr"/>
+            <a:endParaRPr/>
           </a:p>
         </p:txBody>
       </p:sp>
@@ -5797,6 +6035,7 @@
           <a:lstStyle/>
           <a:p>
             <a:pPr algn="ctr"/>
+            <a:endParaRPr/>
           </a:p>
         </p:txBody>
       </p:sp>
@@ -5877,6 +6116,7 @@
           <a:lstStyle/>
           <a:p>
             <a:pPr algn="ctr"/>
+            <a:endParaRPr/>
           </a:p>
         </p:txBody>
       </p:sp>
@@ -5920,6 +6160,7 @@
           <a:lstStyle/>
           <a:p>
             <a:pPr algn="ctr"/>
+            <a:endParaRPr/>
           </a:p>
         </p:txBody>
       </p:sp>
@@ -6000,6 +6241,7 @@
           <a:lstStyle/>
           <a:p>
             <a:pPr algn="ctr"/>
+            <a:endParaRPr/>
           </a:p>
         </p:txBody>
       </p:sp>
@@ -6043,6 +6285,7 @@
           <a:lstStyle/>
           <a:p>
             <a:pPr algn="ctr"/>
+            <a:endParaRPr/>
           </a:p>
         </p:txBody>
       </p:sp>
@@ -6123,6 +6366,7 @@
           <a:lstStyle/>
           <a:p>
             <a:pPr algn="ctr"/>
+            <a:endParaRPr/>
           </a:p>
         </p:txBody>
       </p:sp>
@@ -6166,6 +6410,7 @@
           <a:lstStyle/>
           <a:p>
             <a:pPr algn="ctr"/>
+            <a:endParaRPr/>
           </a:p>
         </p:txBody>
       </p:sp>
@@ -6246,6 +6491,7 @@
           <a:lstStyle/>
           <a:p>
             <a:pPr algn="ctr"/>
+            <a:endParaRPr/>
           </a:p>
         </p:txBody>
       </p:sp>
@@ -6289,6 +6535,7 @@
           <a:lstStyle/>
           <a:p>
             <a:pPr algn="ctr"/>
+            <a:endParaRPr/>
           </a:p>
         </p:txBody>
       </p:sp>
@@ -6369,6 +6616,7 @@
           <a:lstStyle/>
           <a:p>
             <a:pPr algn="ctr"/>
+            <a:endParaRPr/>
           </a:p>
         </p:txBody>
       </p:sp>
@@ -6412,6 +6660,7 @@
           <a:lstStyle/>
           <a:p>
             <a:pPr algn="ctr"/>
+            <a:endParaRPr/>
           </a:p>
         </p:txBody>
       </p:sp>
@@ -6492,6 +6741,7 @@
           <a:lstStyle/>
           <a:p>
             <a:pPr algn="ctr"/>
+            <a:endParaRPr/>
           </a:p>
         </p:txBody>
       </p:sp>
@@ -6535,6 +6785,7 @@
           <a:lstStyle/>
           <a:p>
             <a:pPr algn="ctr"/>
+            <a:endParaRPr/>
           </a:p>
         </p:txBody>
       </p:sp>
@@ -6615,6 +6866,7 @@
           <a:lstStyle/>
           <a:p>
             <a:pPr algn="ctr"/>
+            <a:endParaRPr/>
           </a:p>
         </p:txBody>
       </p:sp>
@@ -6658,6 +6910,7 @@
           <a:lstStyle/>
           <a:p>
             <a:pPr algn="ctr"/>
+            <a:endParaRPr/>
           </a:p>
         </p:txBody>
       </p:sp>
@@ -6738,6 +6991,7 @@
           <a:lstStyle/>
           <a:p>
             <a:pPr algn="ctr"/>
+            <a:endParaRPr/>
           </a:p>
         </p:txBody>
       </p:sp>
@@ -6781,6 +7035,7 @@
           <a:lstStyle/>
           <a:p>
             <a:pPr algn="ctr"/>
+            <a:endParaRPr/>
           </a:p>
         </p:txBody>
       </p:sp>
@@ -6861,6 +7116,7 @@
           <a:lstStyle/>
           <a:p>
             <a:pPr algn="ctr"/>
+            <a:endParaRPr/>
           </a:p>
         </p:txBody>
       </p:sp>
@@ -6904,6 +7160,7 @@
           <a:lstStyle/>
           <a:p>
             <a:pPr algn="ctr"/>
+            <a:endParaRPr/>
           </a:p>
         </p:txBody>
       </p:sp>
@@ -6984,6 +7241,7 @@
           <a:lstStyle/>
           <a:p>
             <a:pPr algn="ctr"/>
+            <a:endParaRPr/>
           </a:p>
         </p:txBody>
       </p:sp>
@@ -7027,6 +7285,7 @@
           <a:lstStyle/>
           <a:p>
             <a:pPr algn="ctr"/>
+            <a:endParaRPr/>
           </a:p>
         </p:txBody>
       </p:sp>
@@ -7107,6 +7366,7 @@
           <a:lstStyle/>
           <a:p>
             <a:pPr algn="ctr"/>
+            <a:endParaRPr/>
           </a:p>
         </p:txBody>
       </p:sp>
@@ -7150,6 +7410,7 @@
           <a:lstStyle/>
           <a:p>
             <a:pPr algn="ctr"/>
+            <a:endParaRPr/>
           </a:p>
         </p:txBody>
       </p:sp>
@@ -7230,6 +7491,7 @@
           <a:lstStyle/>
           <a:p>
             <a:pPr algn="ctr"/>
+            <a:endParaRPr/>
           </a:p>
         </p:txBody>
       </p:sp>
@@ -7273,6 +7535,7 @@
           <a:lstStyle/>
           <a:p>
             <a:pPr algn="ctr"/>
+            <a:endParaRPr/>
           </a:p>
         </p:txBody>
       </p:sp>
@@ -7353,6 +7616,7 @@
           <a:lstStyle/>
           <a:p>
             <a:pPr algn="ctr"/>
+            <a:endParaRPr/>
           </a:p>
         </p:txBody>
       </p:sp>
@@ -7396,6 +7660,7 @@
           <a:lstStyle/>
           <a:p>
             <a:pPr algn="ctr"/>
+            <a:endParaRPr/>
           </a:p>
         </p:txBody>
       </p:sp>
@@ -7474,11 +7739,23 @@
   <p:clrMapOvr>
     <a:masterClrMapping/>
   </p:clrMapOvr>
+  <mc:AlternateContent xmlns:mc="http://schemas.openxmlformats.org/markup-compatibility/2006">
+    <mc:Choice xmlns:p159="http://schemas.microsoft.com/office/powerpoint/2015/09/main" Requires="p159">
+      <p:transition>
+        <p159:morph option="byObject"/>
+      </p:transition>
+    </mc:Choice>
+    <mc:Fallback>
+      <p:transition>
+        <p:fade/>
+      </p:transition>
+    </mc:Fallback>
+  </mc:AlternateContent>
 </p:sld>
 </file>
 
 <file path=ppt/slides/slide14.xml><?xml version="1.0" encoding="utf-8"?>
-<p:sld xmlns:a="http://schemas.openxmlformats.org/drawingml/2006/main" xmlns:p="http://schemas.openxmlformats.org/presentationml/2006/main" xmlns:r="http://schemas.openxmlformats.org/officeDocument/2006/relationships">
+<p:sld xmlns:a="http://schemas.openxmlformats.org/drawingml/2006/main" xmlns:r="http://schemas.openxmlformats.org/officeDocument/2006/relationships" xmlns:p="http://schemas.openxmlformats.org/presentationml/2006/main">
   <p:cSld>
     <p:bg>
       <p:bgPr>
@@ -7494,7 +7771,14 @@
         <p:cNvGrpSpPr/>
         <p:nvPr/>
       </p:nvGrpSpPr>
-      <p:grpSpPr/>
+      <p:grpSpPr>
+        <a:xfrm>
+          <a:off x="0" y="0"/>
+          <a:ext cx="0" cy="0"/>
+          <a:chOff x="0" y="0"/>
+          <a:chExt cx="0" cy="0"/>
+        </a:xfrm>
+      </p:grpSpPr>
       <p:sp>
         <p:nvSpPr>
           <p:cNvPr id="2" name="Rectangle 1"/>
@@ -7535,6 +7819,7 @@
           <a:lstStyle/>
           <a:p>
             <a:pPr algn="ctr"/>
+            <a:endParaRPr/>
           </a:p>
         </p:txBody>
       </p:sp>
@@ -7615,6 +7900,7 @@
           <a:lstStyle/>
           <a:p>
             <a:pPr algn="ctr"/>
+            <a:endParaRPr/>
           </a:p>
         </p:txBody>
       </p:sp>
@@ -7658,6 +7944,7 @@
           <a:lstStyle/>
           <a:p>
             <a:pPr algn="ctr"/>
+            <a:endParaRPr/>
           </a:p>
         </p:txBody>
       </p:sp>
@@ -7776,6 +8063,7 @@
           <a:lstStyle/>
           <a:p>
             <a:pPr algn="ctr"/>
+            <a:endParaRPr/>
           </a:p>
         </p:txBody>
       </p:sp>
@@ -7819,6 +8107,7 @@
           <a:lstStyle/>
           <a:p>
             <a:pPr algn="ctr"/>
+            <a:endParaRPr/>
           </a:p>
         </p:txBody>
       </p:sp>
@@ -7937,6 +8226,7 @@
           <a:lstStyle/>
           <a:p>
             <a:pPr algn="ctr"/>
+            <a:endParaRPr/>
           </a:p>
         </p:txBody>
       </p:sp>
@@ -7980,6 +8270,7 @@
           <a:lstStyle/>
           <a:p>
             <a:pPr algn="ctr"/>
+            <a:endParaRPr/>
           </a:p>
         </p:txBody>
       </p:sp>
@@ -8098,6 +8389,7 @@
           <a:lstStyle/>
           <a:p>
             <a:pPr algn="ctr"/>
+            <a:endParaRPr/>
           </a:p>
         </p:txBody>
       </p:sp>
@@ -8141,6 +8433,7 @@
           <a:lstStyle/>
           <a:p>
             <a:pPr algn="ctr"/>
+            <a:endParaRPr/>
           </a:p>
         </p:txBody>
       </p:sp>
@@ -8259,6 +8552,7 @@
           <a:lstStyle/>
           <a:p>
             <a:pPr algn="ctr"/>
+            <a:endParaRPr/>
           </a:p>
         </p:txBody>
       </p:sp>
@@ -8302,6 +8596,7 @@
           <a:lstStyle/>
           <a:p>
             <a:pPr algn="ctr"/>
+            <a:endParaRPr/>
           </a:p>
         </p:txBody>
       </p:sp>
@@ -8420,6 +8715,7 @@
           <a:lstStyle/>
           <a:p>
             <a:pPr algn="ctr"/>
+            <a:endParaRPr/>
           </a:p>
         </p:txBody>
       </p:sp>
@@ -8463,6 +8759,7 @@
           <a:lstStyle/>
           <a:p>
             <a:pPr algn="ctr"/>
+            <a:endParaRPr/>
           </a:p>
         </p:txBody>
       </p:sp>
@@ -8581,6 +8878,7 @@
           <a:lstStyle/>
           <a:p>
             <a:pPr algn="ctr"/>
+            <a:endParaRPr/>
           </a:p>
         </p:txBody>
       </p:sp>
@@ -8624,6 +8922,7 @@
           <a:lstStyle/>
           <a:p>
             <a:pPr algn="ctr"/>
+            <a:endParaRPr/>
           </a:p>
         </p:txBody>
       </p:sp>
@@ -8742,6 +9041,7 @@
           <a:lstStyle/>
           <a:p>
             <a:pPr algn="ctr"/>
+            <a:endParaRPr/>
           </a:p>
         </p:txBody>
       </p:sp>
@@ -8785,6 +9085,7 @@
           <a:lstStyle/>
           <a:p>
             <a:pPr algn="ctr"/>
+            <a:endParaRPr/>
           </a:p>
         </p:txBody>
       </p:sp>
@@ -8903,6 +9204,7 @@
           <a:lstStyle/>
           <a:p>
             <a:pPr algn="ctr"/>
+            <a:endParaRPr/>
           </a:p>
         </p:txBody>
       </p:sp>
@@ -8946,6 +9248,7 @@
           <a:lstStyle/>
           <a:p>
             <a:pPr algn="ctr"/>
+            <a:endParaRPr/>
           </a:p>
         </p:txBody>
       </p:sp>
@@ -9062,11 +9365,23 @@
   <p:clrMapOvr>
     <a:masterClrMapping/>
   </p:clrMapOvr>
+  <mc:AlternateContent xmlns:mc="http://schemas.openxmlformats.org/markup-compatibility/2006">
+    <mc:Choice xmlns:p159="http://schemas.microsoft.com/office/powerpoint/2015/09/main" Requires="p159">
+      <p:transition>
+        <p159:morph option="byObject"/>
+      </p:transition>
+    </mc:Choice>
+    <mc:Fallback>
+      <p:transition>
+        <p:fade/>
+      </p:transition>
+    </mc:Fallback>
+  </mc:AlternateContent>
 </p:sld>
 </file>
 
 <file path=ppt/slides/slide15.xml><?xml version="1.0" encoding="utf-8"?>
-<p:sld xmlns:a="http://schemas.openxmlformats.org/drawingml/2006/main" xmlns:p="http://schemas.openxmlformats.org/presentationml/2006/main" xmlns:r="http://schemas.openxmlformats.org/officeDocument/2006/relationships">
+<p:sld xmlns:a="http://schemas.openxmlformats.org/drawingml/2006/main" xmlns:r="http://schemas.openxmlformats.org/officeDocument/2006/relationships" xmlns:p="http://schemas.openxmlformats.org/presentationml/2006/main">
   <p:cSld>
     <p:bg>
       <p:bgPr>
@@ -9082,7 +9397,14 @@
         <p:cNvGrpSpPr/>
         <p:nvPr/>
       </p:nvGrpSpPr>
-      <p:grpSpPr/>
+      <p:grpSpPr>
+        <a:xfrm>
+          <a:off x="0" y="0"/>
+          <a:ext cx="0" cy="0"/>
+          <a:chOff x="0" y="0"/>
+          <a:chExt cx="0" cy="0"/>
+        </a:xfrm>
+      </p:grpSpPr>
       <p:sp>
         <p:nvSpPr>
           <p:cNvPr id="2" name="Rectangle 1"/>
@@ -9123,6 +9445,7 @@
           <a:lstStyle/>
           <a:p>
             <a:pPr algn="ctr"/>
+            <a:endParaRPr/>
           </a:p>
         </p:txBody>
       </p:sp>
@@ -9203,49 +9526,7 @@
           <a:lstStyle/>
           <a:p>
             <a:pPr algn="ctr"/>
-          </a:p>
-        </p:txBody>
-      </p:sp>
-      <p:sp>
-        <p:nvSpPr>
-          <p:cNvPr id="5" name="Rectangle 4"/>
-          <p:cNvSpPr/>
-          <p:nvPr/>
-        </p:nvSpPr>
-        <p:spPr>
-          <a:xfrm>
-            <a:off x="914400" y="1828800"/>
-            <a:ext cx="54864" cy="1828800"/>
-          </a:xfrm>
-          <a:prstGeom prst="rect">
-            <a:avLst/>
-          </a:prstGeom>
-          <a:solidFill>
-            <a:srgbClr val="33BEDC"/>
-          </a:solidFill>
-          <a:ln>
-            <a:noFill/>
-          </a:ln>
-        </p:spPr>
-        <p:style>
-          <a:lnRef idx="1">
-            <a:schemeClr val="accent1"/>
-          </a:lnRef>
-          <a:fillRef idx="3">
-            <a:schemeClr val="accent1"/>
-          </a:fillRef>
-          <a:effectRef idx="2">
-            <a:schemeClr val="accent1"/>
-          </a:effectRef>
-          <a:fontRef idx="minor">
-            <a:schemeClr val="lt1"/>
-          </a:fontRef>
-        </p:style>
-        <p:txBody>
-          <a:bodyPr rtlCol="0" anchor="ctr"/>
-          <a:lstStyle/>
-          <a:p>
-            <a:pPr algn="ctr"/>
+            <a:endParaRPr/>
           </a:p>
         </p:txBody>
       </p:sp>
@@ -9397,11 +9678,23 @@
   <p:clrMapOvr>
     <a:masterClrMapping/>
   </p:clrMapOvr>
+  <mc:AlternateContent xmlns:mc="http://schemas.openxmlformats.org/markup-compatibility/2006">
+    <mc:Choice xmlns:p159="http://schemas.microsoft.com/office/powerpoint/2015/09/main" Requires="p159">
+      <p:transition>
+        <p159:morph option="byObject"/>
+      </p:transition>
+    </mc:Choice>
+    <mc:Fallback>
+      <p:transition>
+        <p:fade/>
+      </p:transition>
+    </mc:Fallback>
+  </mc:AlternateContent>
 </p:sld>
 </file>
 
 <file path=ppt/slides/slide2.xml><?xml version="1.0" encoding="utf-8"?>
-<p:sld xmlns:a="http://schemas.openxmlformats.org/drawingml/2006/main" xmlns:p="http://schemas.openxmlformats.org/presentationml/2006/main" xmlns:r="http://schemas.openxmlformats.org/officeDocument/2006/relationships">
+<p:sld xmlns:a="http://schemas.openxmlformats.org/drawingml/2006/main" xmlns:r="http://schemas.openxmlformats.org/officeDocument/2006/relationships" xmlns:p="http://schemas.openxmlformats.org/presentationml/2006/main">
   <p:cSld>
     <p:bg>
       <p:bgPr>
@@ -9417,7 +9710,14 @@
         <p:cNvGrpSpPr/>
         <p:nvPr/>
       </p:nvGrpSpPr>
-      <p:grpSpPr/>
+      <p:grpSpPr>
+        <a:xfrm>
+          <a:off x="0" y="0"/>
+          <a:ext cx="0" cy="0"/>
+          <a:chOff x="0" y="0"/>
+          <a:chExt cx="0" cy="0"/>
+        </a:xfrm>
+      </p:grpSpPr>
       <p:sp>
         <p:nvSpPr>
           <p:cNvPr id="2" name="Rectangle 1"/>
@@ -9458,6 +9758,7 @@
           <a:lstStyle/>
           <a:p>
             <a:pPr algn="ctr"/>
+            <a:endParaRPr/>
           </a:p>
         </p:txBody>
       </p:sp>
@@ -9538,49 +9839,7 @@
           <a:lstStyle/>
           <a:p>
             <a:pPr algn="ctr"/>
-          </a:p>
-        </p:txBody>
-      </p:sp>
-      <p:sp>
-        <p:nvSpPr>
-          <p:cNvPr id="5" name="Rectangle 4"/>
-          <p:cNvSpPr/>
-          <p:nvPr/>
-        </p:nvSpPr>
-        <p:spPr>
-          <a:xfrm>
-            <a:off x="640080" y="1417320"/>
-            <a:ext cx="54864" cy="4297680"/>
-          </a:xfrm>
-          <a:prstGeom prst="rect">
-            <a:avLst/>
-          </a:prstGeom>
-          <a:solidFill>
-            <a:srgbClr val="33BEDC"/>
-          </a:solidFill>
-          <a:ln>
-            <a:noFill/>
-          </a:ln>
-        </p:spPr>
-        <p:style>
-          <a:lnRef idx="1">
-            <a:schemeClr val="accent1"/>
-          </a:lnRef>
-          <a:fillRef idx="3">
-            <a:schemeClr val="accent1"/>
-          </a:fillRef>
-          <a:effectRef idx="2">
-            <a:schemeClr val="accent1"/>
-          </a:effectRef>
-          <a:fontRef idx="minor">
-            <a:schemeClr val="lt1"/>
-          </a:fontRef>
-        </p:style>
-        <p:txBody>
-          <a:bodyPr rtlCol="0" anchor="ctr"/>
-          <a:lstStyle/>
-          <a:p>
-            <a:pPr algn="ctr"/>
+            <a:endParaRPr/>
           </a:p>
         </p:txBody>
       </p:sp>
@@ -9729,49 +9988,7 @@
           <a:lstStyle/>
           <a:p>
             <a:pPr algn="ctr"/>
-          </a:p>
-        </p:txBody>
-      </p:sp>
-      <p:sp>
-        <p:nvSpPr>
-          <p:cNvPr id="9" name="Rectangle 8"/>
-          <p:cNvSpPr/>
-          <p:nvPr/>
-        </p:nvSpPr>
-        <p:spPr>
-          <a:xfrm>
-            <a:off x="4343400" y="1417320"/>
-            <a:ext cx="54864" cy="4297680"/>
-          </a:xfrm>
-          <a:prstGeom prst="rect">
-            <a:avLst/>
-          </a:prstGeom>
-          <a:solidFill>
-            <a:srgbClr val="2669E6"/>
-          </a:solidFill>
-          <a:ln>
-            <a:noFill/>
-          </a:ln>
-        </p:spPr>
-        <p:style>
-          <a:lnRef idx="1">
-            <a:schemeClr val="accent1"/>
-          </a:lnRef>
-          <a:fillRef idx="3">
-            <a:schemeClr val="accent1"/>
-          </a:fillRef>
-          <a:effectRef idx="2">
-            <a:schemeClr val="accent1"/>
-          </a:effectRef>
-          <a:fontRef idx="minor">
-            <a:schemeClr val="lt1"/>
-          </a:fontRef>
-        </p:style>
-        <p:txBody>
-          <a:bodyPr rtlCol="0" anchor="ctr"/>
-          <a:lstStyle/>
-          <a:p>
-            <a:pPr algn="ctr"/>
+            <a:endParaRPr/>
           </a:p>
         </p:txBody>
       </p:sp>
@@ -9920,49 +10137,7 @@
           <a:lstStyle/>
           <a:p>
             <a:pPr algn="ctr"/>
-          </a:p>
-        </p:txBody>
-      </p:sp>
-      <p:sp>
-        <p:nvSpPr>
-          <p:cNvPr id="13" name="Rectangle 12"/>
-          <p:cNvSpPr/>
-          <p:nvPr/>
-        </p:nvSpPr>
-        <p:spPr>
-          <a:xfrm>
-            <a:off x="8046720" y="1417320"/>
-            <a:ext cx="54864" cy="4297680"/>
-          </a:xfrm>
-          <a:prstGeom prst="rect">
-            <a:avLst/>
-          </a:prstGeom>
-          <a:solidFill>
-            <a:srgbClr val="33BEDC"/>
-          </a:solidFill>
-          <a:ln>
-            <a:noFill/>
-          </a:ln>
-        </p:spPr>
-        <p:style>
-          <a:lnRef idx="1">
-            <a:schemeClr val="accent1"/>
-          </a:lnRef>
-          <a:fillRef idx="3">
-            <a:schemeClr val="accent1"/>
-          </a:fillRef>
-          <a:effectRef idx="2">
-            <a:schemeClr val="accent1"/>
-          </a:effectRef>
-          <a:fontRef idx="minor">
-            <a:schemeClr val="lt1"/>
-          </a:fontRef>
-        </p:style>
-        <p:txBody>
-          <a:bodyPr rtlCol="0" anchor="ctr"/>
-          <a:lstStyle/>
-          <a:p>
-            <a:pPr algn="ctr"/>
+            <a:endParaRPr/>
           </a:p>
         </p:txBody>
       </p:sp>
@@ -10109,11 +10284,23 @@
   <p:clrMapOvr>
     <a:masterClrMapping/>
   </p:clrMapOvr>
+  <mc:AlternateContent xmlns:mc="http://schemas.openxmlformats.org/markup-compatibility/2006">
+    <mc:Choice xmlns:p159="http://schemas.microsoft.com/office/powerpoint/2015/09/main" Requires="p159">
+      <p:transition>
+        <p159:morph option="byObject"/>
+      </p:transition>
+    </mc:Choice>
+    <mc:Fallback>
+      <p:transition>
+        <p:fade/>
+      </p:transition>
+    </mc:Fallback>
+  </mc:AlternateContent>
 </p:sld>
 </file>
 
 <file path=ppt/slides/slide3.xml><?xml version="1.0" encoding="utf-8"?>
-<p:sld xmlns:a="http://schemas.openxmlformats.org/drawingml/2006/main" xmlns:p="http://schemas.openxmlformats.org/presentationml/2006/main" xmlns:r="http://schemas.openxmlformats.org/officeDocument/2006/relationships">
+<p:sld xmlns:a="http://schemas.openxmlformats.org/drawingml/2006/main" xmlns:r="http://schemas.openxmlformats.org/officeDocument/2006/relationships" xmlns:p="http://schemas.openxmlformats.org/presentationml/2006/main">
   <p:cSld>
     <p:bg>
       <p:bgPr>
@@ -10129,7 +10316,14 @@
         <p:cNvGrpSpPr/>
         <p:nvPr/>
       </p:nvGrpSpPr>
-      <p:grpSpPr/>
+      <p:grpSpPr>
+        <a:xfrm>
+          <a:off x="0" y="0"/>
+          <a:ext cx="0" cy="0"/>
+          <a:chOff x="0" y="0"/>
+          <a:chExt cx="0" cy="0"/>
+        </a:xfrm>
+      </p:grpSpPr>
       <p:sp>
         <p:nvSpPr>
           <p:cNvPr id="2" name="Rectangle 1"/>
@@ -10170,6 +10364,7 @@
           <a:lstStyle/>
           <a:p>
             <a:pPr algn="ctr"/>
+            <a:endParaRPr/>
           </a:p>
         </p:txBody>
       </p:sp>
@@ -10250,49 +10445,7 @@
           <a:lstStyle/>
           <a:p>
             <a:pPr algn="ctr"/>
-          </a:p>
-        </p:txBody>
-      </p:sp>
-      <p:sp>
-        <p:nvSpPr>
-          <p:cNvPr id="5" name="Rectangle 4"/>
-          <p:cNvSpPr/>
-          <p:nvPr/>
-        </p:nvSpPr>
-        <p:spPr>
-          <a:xfrm>
-            <a:off x="685800" y="1325880"/>
-            <a:ext cx="54864" cy="4480560"/>
-          </a:xfrm>
-          <a:prstGeom prst="rect">
-            <a:avLst/>
-          </a:prstGeom>
-          <a:solidFill>
-            <a:srgbClr val="2669E6"/>
-          </a:solidFill>
-          <a:ln>
-            <a:noFill/>
-          </a:ln>
-        </p:spPr>
-        <p:style>
-          <a:lnRef idx="1">
-            <a:schemeClr val="accent1"/>
-          </a:lnRef>
-          <a:fillRef idx="3">
-            <a:schemeClr val="accent1"/>
-          </a:fillRef>
-          <a:effectRef idx="2">
-            <a:schemeClr val="accent1"/>
-          </a:effectRef>
-          <a:fontRef idx="minor">
-            <a:schemeClr val="lt1"/>
-          </a:fontRef>
-        </p:style>
-        <p:txBody>
-          <a:bodyPr rtlCol="0" anchor="ctr"/>
-          <a:lstStyle/>
-          <a:p>
-            <a:pPr algn="ctr"/>
+            <a:endParaRPr/>
           </a:p>
         </p:txBody>
       </p:sp>
@@ -10471,49 +10624,7 @@
           <a:lstStyle/>
           <a:p>
             <a:pPr algn="ctr"/>
-          </a:p>
-        </p:txBody>
-      </p:sp>
-      <p:sp>
-        <p:nvSpPr>
-          <p:cNvPr id="9" name="Rectangle 8"/>
-          <p:cNvSpPr/>
-          <p:nvPr/>
-        </p:nvSpPr>
-        <p:spPr>
-          <a:xfrm>
-            <a:off x="6263640" y="1325880"/>
-            <a:ext cx="54864" cy="4480560"/>
-          </a:xfrm>
-          <a:prstGeom prst="rect">
-            <a:avLst/>
-          </a:prstGeom>
-          <a:solidFill>
-            <a:srgbClr val="33BEDC"/>
-          </a:solidFill>
-          <a:ln>
-            <a:noFill/>
-          </a:ln>
-        </p:spPr>
-        <p:style>
-          <a:lnRef idx="1">
-            <a:schemeClr val="accent1"/>
-          </a:lnRef>
-          <a:fillRef idx="3">
-            <a:schemeClr val="accent1"/>
-          </a:fillRef>
-          <a:effectRef idx="2">
-            <a:schemeClr val="accent1"/>
-          </a:effectRef>
-          <a:fontRef idx="minor">
-            <a:schemeClr val="lt1"/>
-          </a:fontRef>
-        </p:style>
-        <p:txBody>
-          <a:bodyPr rtlCol="0" anchor="ctr"/>
-          <a:lstStyle/>
-          <a:p>
-            <a:pPr algn="ctr"/>
+            <a:endParaRPr/>
           </a:p>
         </p:txBody>
       </p:sp>
@@ -10675,11 +10786,23 @@
   <p:clrMapOvr>
     <a:masterClrMapping/>
   </p:clrMapOvr>
+  <mc:AlternateContent xmlns:mc="http://schemas.openxmlformats.org/markup-compatibility/2006">
+    <mc:Choice xmlns:p159="http://schemas.microsoft.com/office/powerpoint/2015/09/main" Requires="p159">
+      <p:transition>
+        <p159:morph option="byObject"/>
+      </p:transition>
+    </mc:Choice>
+    <mc:Fallback>
+      <p:transition>
+        <p:fade/>
+      </p:transition>
+    </mc:Fallback>
+  </mc:AlternateContent>
 </p:sld>
 </file>
 
 <file path=ppt/slides/slide4.xml><?xml version="1.0" encoding="utf-8"?>
-<p:sld xmlns:a="http://schemas.openxmlformats.org/drawingml/2006/main" xmlns:p="http://schemas.openxmlformats.org/presentationml/2006/main" xmlns:r="http://schemas.openxmlformats.org/officeDocument/2006/relationships">
+<p:sld xmlns:a="http://schemas.openxmlformats.org/drawingml/2006/main" xmlns:r="http://schemas.openxmlformats.org/officeDocument/2006/relationships" xmlns:p="http://schemas.openxmlformats.org/presentationml/2006/main">
   <p:cSld>
     <p:bg>
       <p:bgPr>
@@ -10695,7 +10818,14 @@
         <p:cNvGrpSpPr/>
         <p:nvPr/>
       </p:nvGrpSpPr>
-      <p:grpSpPr/>
+      <p:grpSpPr>
+        <a:xfrm>
+          <a:off x="0" y="0"/>
+          <a:ext cx="0" cy="0"/>
+          <a:chOff x="0" y="0"/>
+          <a:chExt cx="0" cy="0"/>
+        </a:xfrm>
+      </p:grpSpPr>
       <p:sp>
         <p:nvSpPr>
           <p:cNvPr id="2" name="Rectangle 1"/>
@@ -10736,6 +10866,7 @@
           <a:lstStyle/>
           <a:p>
             <a:pPr algn="ctr"/>
+            <a:endParaRPr/>
           </a:p>
         </p:txBody>
       </p:sp>
@@ -11472,11 +11603,23 @@
   <p:clrMapOvr>
     <a:masterClrMapping/>
   </p:clrMapOvr>
+  <mc:AlternateContent xmlns:mc="http://schemas.openxmlformats.org/markup-compatibility/2006">
+    <mc:Choice xmlns:p159="http://schemas.microsoft.com/office/powerpoint/2015/09/main" Requires="p159">
+      <p:transition>
+        <p159:morph option="byObject"/>
+      </p:transition>
+    </mc:Choice>
+    <mc:Fallback>
+      <p:transition>
+        <p:fade/>
+      </p:transition>
+    </mc:Fallback>
+  </mc:AlternateContent>
 </p:sld>
 </file>
 
 <file path=ppt/slides/slide5.xml><?xml version="1.0" encoding="utf-8"?>
-<p:sld xmlns:a="http://schemas.openxmlformats.org/drawingml/2006/main" xmlns:p="http://schemas.openxmlformats.org/presentationml/2006/main" xmlns:r="http://schemas.openxmlformats.org/officeDocument/2006/relationships">
+<p:sld xmlns:a="http://schemas.openxmlformats.org/drawingml/2006/main" xmlns:r="http://schemas.openxmlformats.org/officeDocument/2006/relationships" xmlns:p="http://schemas.openxmlformats.org/presentationml/2006/main">
   <p:cSld>
     <p:bg>
       <p:bgPr>
@@ -11492,7 +11635,14 @@
         <p:cNvGrpSpPr/>
         <p:nvPr/>
       </p:nvGrpSpPr>
-      <p:grpSpPr/>
+      <p:grpSpPr>
+        <a:xfrm>
+          <a:off x="0" y="0"/>
+          <a:ext cx="0" cy="0"/>
+          <a:chOff x="0" y="0"/>
+          <a:chExt cx="0" cy="0"/>
+        </a:xfrm>
+      </p:grpSpPr>
       <p:sp>
         <p:nvSpPr>
           <p:cNvPr id="2" name="Rectangle 1"/>
@@ -11533,6 +11683,7 @@
           <a:lstStyle/>
           <a:p>
             <a:pPr algn="ctr"/>
+            <a:endParaRPr/>
           </a:p>
         </p:txBody>
       </p:sp>
@@ -12838,11 +12989,23 @@
   <p:clrMapOvr>
     <a:masterClrMapping/>
   </p:clrMapOvr>
+  <mc:AlternateContent xmlns:mc="http://schemas.openxmlformats.org/markup-compatibility/2006">
+    <mc:Choice xmlns:p159="http://schemas.microsoft.com/office/powerpoint/2015/09/main" Requires="p159">
+      <p:transition>
+        <p159:morph option="byObject"/>
+      </p:transition>
+    </mc:Choice>
+    <mc:Fallback>
+      <p:transition>
+        <p:fade/>
+      </p:transition>
+    </mc:Fallback>
+  </mc:AlternateContent>
 </p:sld>
 </file>
 
 <file path=ppt/slides/slide6.xml><?xml version="1.0" encoding="utf-8"?>
-<p:sld xmlns:a="http://schemas.openxmlformats.org/drawingml/2006/main" xmlns:p="http://schemas.openxmlformats.org/presentationml/2006/main" xmlns:r="http://schemas.openxmlformats.org/officeDocument/2006/relationships">
+<p:sld xmlns:a="http://schemas.openxmlformats.org/drawingml/2006/main" xmlns:r="http://schemas.openxmlformats.org/officeDocument/2006/relationships" xmlns:p="http://schemas.openxmlformats.org/presentationml/2006/main">
   <p:cSld>
     <p:bg>
       <p:bgPr>
@@ -12858,7 +13021,14 @@
         <p:cNvGrpSpPr/>
         <p:nvPr/>
       </p:nvGrpSpPr>
-      <p:grpSpPr/>
+      <p:grpSpPr>
+        <a:xfrm>
+          <a:off x="0" y="0"/>
+          <a:ext cx="0" cy="0"/>
+          <a:chOff x="0" y="0"/>
+          <a:chExt cx="0" cy="0"/>
+        </a:xfrm>
+      </p:grpSpPr>
       <p:sp>
         <p:nvSpPr>
           <p:cNvPr id="2" name="Rectangle 1"/>
@@ -12899,6 +13069,7 @@
           <a:lstStyle/>
           <a:p>
             <a:pPr algn="ctr"/>
+            <a:endParaRPr/>
           </a:p>
         </p:txBody>
       </p:sp>
@@ -12979,49 +13150,7 @@
           <a:lstStyle/>
           <a:p>
             <a:pPr algn="ctr"/>
-          </a:p>
-        </p:txBody>
-      </p:sp>
-      <p:sp>
-        <p:nvSpPr>
-          <p:cNvPr id="5" name="Rectangle 4"/>
-          <p:cNvSpPr/>
-          <p:nvPr/>
-        </p:nvSpPr>
-        <p:spPr>
-          <a:xfrm>
-            <a:off x="640080" y="1234440"/>
-            <a:ext cx="54864" cy="1143000"/>
-          </a:xfrm>
-          <a:prstGeom prst="rect">
-            <a:avLst/>
-          </a:prstGeom>
-          <a:solidFill>
-            <a:srgbClr val="2669E6"/>
-          </a:solidFill>
-          <a:ln>
-            <a:noFill/>
-          </a:ln>
-        </p:spPr>
-        <p:style>
-          <a:lnRef idx="1">
-            <a:schemeClr val="accent1"/>
-          </a:lnRef>
-          <a:fillRef idx="3">
-            <a:schemeClr val="accent1"/>
-          </a:fillRef>
-          <a:effectRef idx="2">
-            <a:schemeClr val="accent1"/>
-          </a:effectRef>
-          <a:fontRef idx="minor">
-            <a:schemeClr val="lt1"/>
-          </a:fontRef>
-        </p:style>
-        <p:txBody>
-          <a:bodyPr rtlCol="0" anchor="ctr"/>
-          <a:lstStyle/>
-          <a:p>
-            <a:pPr algn="ctr"/>
+            <a:endParaRPr/>
           </a:p>
         </p:txBody>
       </p:sp>
@@ -13140,49 +13269,7 @@
           <a:lstStyle/>
           <a:p>
             <a:pPr algn="ctr"/>
-          </a:p>
-        </p:txBody>
-      </p:sp>
-      <p:sp>
-        <p:nvSpPr>
-          <p:cNvPr id="9" name="Rectangle 8"/>
-          <p:cNvSpPr/>
-          <p:nvPr/>
-        </p:nvSpPr>
-        <p:spPr>
-          <a:xfrm>
-            <a:off x="6263640" y="1234440"/>
-            <a:ext cx="54864" cy="1143000"/>
-          </a:xfrm>
-          <a:prstGeom prst="rect">
-            <a:avLst/>
-          </a:prstGeom>
-          <a:solidFill>
-            <a:srgbClr val="33BEDC"/>
-          </a:solidFill>
-          <a:ln>
-            <a:noFill/>
-          </a:ln>
-        </p:spPr>
-        <p:style>
-          <a:lnRef idx="1">
-            <a:schemeClr val="accent1"/>
-          </a:lnRef>
-          <a:fillRef idx="3">
-            <a:schemeClr val="accent1"/>
-          </a:fillRef>
-          <a:effectRef idx="2">
-            <a:schemeClr val="accent1"/>
-          </a:effectRef>
-          <a:fontRef idx="minor">
-            <a:schemeClr val="lt1"/>
-          </a:fontRef>
-        </p:style>
-        <p:txBody>
-          <a:bodyPr rtlCol="0" anchor="ctr"/>
-          <a:lstStyle/>
-          <a:p>
-            <a:pPr algn="ctr"/>
+            <a:endParaRPr/>
           </a:p>
         </p:txBody>
       </p:sp>
@@ -13301,49 +13388,7 @@
           <a:lstStyle/>
           <a:p>
             <a:pPr algn="ctr"/>
-          </a:p>
-        </p:txBody>
-      </p:sp>
-      <p:sp>
-        <p:nvSpPr>
-          <p:cNvPr id="13" name="Rectangle 12"/>
-          <p:cNvSpPr/>
-          <p:nvPr/>
-        </p:nvSpPr>
-        <p:spPr>
-          <a:xfrm>
-            <a:off x="640080" y="2651760"/>
-            <a:ext cx="54864" cy="1143000"/>
-          </a:xfrm>
-          <a:prstGeom prst="rect">
-            <a:avLst/>
-          </a:prstGeom>
-          <a:solidFill>
-            <a:srgbClr val="2669E6"/>
-          </a:solidFill>
-          <a:ln>
-            <a:noFill/>
-          </a:ln>
-        </p:spPr>
-        <p:style>
-          <a:lnRef idx="1">
-            <a:schemeClr val="accent1"/>
-          </a:lnRef>
-          <a:fillRef idx="3">
-            <a:schemeClr val="accent1"/>
-          </a:fillRef>
-          <a:effectRef idx="2">
-            <a:schemeClr val="accent1"/>
-          </a:effectRef>
-          <a:fontRef idx="minor">
-            <a:schemeClr val="lt1"/>
-          </a:fontRef>
-        </p:style>
-        <p:txBody>
-          <a:bodyPr rtlCol="0" anchor="ctr"/>
-          <a:lstStyle/>
-          <a:p>
-            <a:pPr algn="ctr"/>
+            <a:endParaRPr/>
           </a:p>
         </p:txBody>
       </p:sp>
@@ -13462,49 +13507,7 @@
           <a:lstStyle/>
           <a:p>
             <a:pPr algn="ctr"/>
-          </a:p>
-        </p:txBody>
-      </p:sp>
-      <p:sp>
-        <p:nvSpPr>
-          <p:cNvPr id="17" name="Rectangle 16"/>
-          <p:cNvSpPr/>
-          <p:nvPr/>
-        </p:nvSpPr>
-        <p:spPr>
-          <a:xfrm>
-            <a:off x="6263640" y="2651760"/>
-            <a:ext cx="54864" cy="1143000"/>
-          </a:xfrm>
-          <a:prstGeom prst="rect">
-            <a:avLst/>
-          </a:prstGeom>
-          <a:solidFill>
-            <a:srgbClr val="33BEDC"/>
-          </a:solidFill>
-          <a:ln>
-            <a:noFill/>
-          </a:ln>
-        </p:spPr>
-        <p:style>
-          <a:lnRef idx="1">
-            <a:schemeClr val="accent1"/>
-          </a:lnRef>
-          <a:fillRef idx="3">
-            <a:schemeClr val="accent1"/>
-          </a:fillRef>
-          <a:effectRef idx="2">
-            <a:schemeClr val="accent1"/>
-          </a:effectRef>
-          <a:fontRef idx="minor">
-            <a:schemeClr val="lt1"/>
-          </a:fontRef>
-        </p:style>
-        <p:txBody>
-          <a:bodyPr rtlCol="0" anchor="ctr"/>
-          <a:lstStyle/>
-          <a:p>
-            <a:pPr algn="ctr"/>
+            <a:endParaRPr/>
           </a:p>
         </p:txBody>
       </p:sp>
@@ -13623,49 +13626,7 @@
           <a:lstStyle/>
           <a:p>
             <a:pPr algn="ctr"/>
-          </a:p>
-        </p:txBody>
-      </p:sp>
-      <p:sp>
-        <p:nvSpPr>
-          <p:cNvPr id="21" name="Rectangle 20"/>
-          <p:cNvSpPr/>
-          <p:nvPr/>
-        </p:nvSpPr>
-        <p:spPr>
-          <a:xfrm>
-            <a:off x="640080" y="4069080"/>
-            <a:ext cx="54864" cy="1143000"/>
-          </a:xfrm>
-          <a:prstGeom prst="rect">
-            <a:avLst/>
-          </a:prstGeom>
-          <a:solidFill>
-            <a:srgbClr val="2669E6"/>
-          </a:solidFill>
-          <a:ln>
-            <a:noFill/>
-          </a:ln>
-        </p:spPr>
-        <p:style>
-          <a:lnRef idx="1">
-            <a:schemeClr val="accent1"/>
-          </a:lnRef>
-          <a:fillRef idx="3">
-            <a:schemeClr val="accent1"/>
-          </a:fillRef>
-          <a:effectRef idx="2">
-            <a:schemeClr val="accent1"/>
-          </a:effectRef>
-          <a:fontRef idx="minor">
-            <a:schemeClr val="lt1"/>
-          </a:fontRef>
-        </p:style>
-        <p:txBody>
-          <a:bodyPr rtlCol="0" anchor="ctr"/>
-          <a:lstStyle/>
-          <a:p>
-            <a:pPr algn="ctr"/>
+            <a:endParaRPr/>
           </a:p>
         </p:txBody>
       </p:sp>
@@ -13784,49 +13745,7 @@
           <a:lstStyle/>
           <a:p>
             <a:pPr algn="ctr"/>
-          </a:p>
-        </p:txBody>
-      </p:sp>
-      <p:sp>
-        <p:nvSpPr>
-          <p:cNvPr id="25" name="Rectangle 24"/>
-          <p:cNvSpPr/>
-          <p:nvPr/>
-        </p:nvSpPr>
-        <p:spPr>
-          <a:xfrm>
-            <a:off x="6263640" y="4069080"/>
-            <a:ext cx="54864" cy="1143000"/>
-          </a:xfrm>
-          <a:prstGeom prst="rect">
-            <a:avLst/>
-          </a:prstGeom>
-          <a:solidFill>
-            <a:srgbClr val="33BEDC"/>
-          </a:solidFill>
-          <a:ln>
-            <a:noFill/>
-          </a:ln>
-        </p:spPr>
-        <p:style>
-          <a:lnRef idx="1">
-            <a:schemeClr val="accent1"/>
-          </a:lnRef>
-          <a:fillRef idx="3">
-            <a:schemeClr val="accent1"/>
-          </a:fillRef>
-          <a:effectRef idx="2">
-            <a:schemeClr val="accent1"/>
-          </a:effectRef>
-          <a:fontRef idx="minor">
-            <a:schemeClr val="lt1"/>
-          </a:fontRef>
-        </p:style>
-        <p:txBody>
-          <a:bodyPr rtlCol="0" anchor="ctr"/>
-          <a:lstStyle/>
-          <a:p>
-            <a:pPr algn="ctr"/>
+            <a:endParaRPr/>
           </a:p>
         </p:txBody>
       </p:sp>
@@ -13945,49 +13864,7 @@
           <a:lstStyle/>
           <a:p>
             <a:pPr algn="ctr"/>
-          </a:p>
-        </p:txBody>
-      </p:sp>
-      <p:sp>
-        <p:nvSpPr>
-          <p:cNvPr id="29" name="Rectangle 28"/>
-          <p:cNvSpPr/>
-          <p:nvPr/>
-        </p:nvSpPr>
-        <p:spPr>
-          <a:xfrm>
-            <a:off x="640080" y="5486400"/>
-            <a:ext cx="54864" cy="1143000"/>
-          </a:xfrm>
-          <a:prstGeom prst="rect">
-            <a:avLst/>
-          </a:prstGeom>
-          <a:solidFill>
-            <a:srgbClr val="2669E6"/>
-          </a:solidFill>
-          <a:ln>
-            <a:noFill/>
-          </a:ln>
-        </p:spPr>
-        <p:style>
-          <a:lnRef idx="1">
-            <a:schemeClr val="accent1"/>
-          </a:lnRef>
-          <a:fillRef idx="3">
-            <a:schemeClr val="accent1"/>
-          </a:fillRef>
-          <a:effectRef idx="2">
-            <a:schemeClr val="accent1"/>
-          </a:effectRef>
-          <a:fontRef idx="minor">
-            <a:schemeClr val="lt1"/>
-          </a:fontRef>
-        </p:style>
-        <p:txBody>
-          <a:bodyPr rtlCol="0" anchor="ctr"/>
-          <a:lstStyle/>
-          <a:p>
-            <a:pPr algn="ctr"/>
+            <a:endParaRPr/>
           </a:p>
         </p:txBody>
       </p:sp>
@@ -14104,11 +13981,23 @@
   <p:clrMapOvr>
     <a:masterClrMapping/>
   </p:clrMapOvr>
+  <mc:AlternateContent xmlns:mc="http://schemas.openxmlformats.org/markup-compatibility/2006">
+    <mc:Choice xmlns:p159="http://schemas.microsoft.com/office/powerpoint/2015/09/main" Requires="p159">
+      <p:transition>
+        <p159:morph option="byObject"/>
+      </p:transition>
+    </mc:Choice>
+    <mc:Fallback>
+      <p:transition>
+        <p:fade/>
+      </p:transition>
+    </mc:Fallback>
+  </mc:AlternateContent>
 </p:sld>
 </file>
 
 <file path=ppt/slides/slide7.xml><?xml version="1.0" encoding="utf-8"?>
-<p:sld xmlns:a="http://schemas.openxmlformats.org/drawingml/2006/main" xmlns:p="http://schemas.openxmlformats.org/presentationml/2006/main" xmlns:r="http://schemas.openxmlformats.org/officeDocument/2006/relationships">
+<p:sld xmlns:a="http://schemas.openxmlformats.org/drawingml/2006/main" xmlns:r="http://schemas.openxmlformats.org/officeDocument/2006/relationships" xmlns:p="http://schemas.openxmlformats.org/presentationml/2006/main">
   <p:cSld>
     <p:bg>
       <p:bgPr>
@@ -14124,7 +14013,14 @@
         <p:cNvGrpSpPr/>
         <p:nvPr/>
       </p:nvGrpSpPr>
-      <p:grpSpPr/>
+      <p:grpSpPr>
+        <a:xfrm>
+          <a:off x="0" y="0"/>
+          <a:ext cx="0" cy="0"/>
+          <a:chOff x="0" y="0"/>
+          <a:chExt cx="0" cy="0"/>
+        </a:xfrm>
+      </p:grpSpPr>
       <p:sp>
         <p:nvSpPr>
           <p:cNvPr id="2" name="Rectangle 1"/>
@@ -14165,6 +14061,7 @@
           <a:lstStyle/>
           <a:p>
             <a:pPr algn="ctr"/>
+            <a:endParaRPr/>
           </a:p>
         </p:txBody>
       </p:sp>
@@ -14245,49 +14142,7 @@
           <a:lstStyle/>
           <a:p>
             <a:pPr algn="ctr"/>
-          </a:p>
-        </p:txBody>
-      </p:sp>
-      <p:sp>
-        <p:nvSpPr>
-          <p:cNvPr id="5" name="Rectangle 4"/>
-          <p:cNvSpPr/>
-          <p:nvPr/>
-        </p:nvSpPr>
-        <p:spPr>
-          <a:xfrm>
-            <a:off x="640080" y="1325880"/>
-            <a:ext cx="54864" cy="4526280"/>
-          </a:xfrm>
-          <a:prstGeom prst="rect">
-            <a:avLst/>
-          </a:prstGeom>
-          <a:solidFill>
-            <a:srgbClr val="33BEDC"/>
-          </a:solidFill>
-          <a:ln>
-            <a:noFill/>
-          </a:ln>
-        </p:spPr>
-        <p:style>
-          <a:lnRef idx="1">
-            <a:schemeClr val="accent1"/>
-          </a:lnRef>
-          <a:fillRef idx="3">
-            <a:schemeClr val="accent1"/>
-          </a:fillRef>
-          <a:effectRef idx="2">
-            <a:schemeClr val="accent1"/>
-          </a:effectRef>
-          <a:fontRef idx="minor">
-            <a:schemeClr val="lt1"/>
-          </a:fontRef>
-        </p:style>
-        <p:txBody>
-          <a:bodyPr rtlCol="0" anchor="ctr"/>
-          <a:lstStyle/>
-          <a:p>
-            <a:pPr algn="ctr"/>
+            <a:endParaRPr/>
           </a:p>
         </p:txBody>
       </p:sp>
@@ -14436,49 +14291,7 @@
           <a:lstStyle/>
           <a:p>
             <a:pPr algn="ctr"/>
-          </a:p>
-        </p:txBody>
-      </p:sp>
-      <p:sp>
-        <p:nvSpPr>
-          <p:cNvPr id="9" name="Rectangle 8"/>
-          <p:cNvSpPr/>
-          <p:nvPr/>
-        </p:nvSpPr>
-        <p:spPr>
-          <a:xfrm>
-            <a:off x="4343400" y="1325880"/>
-            <a:ext cx="54864" cy="4526280"/>
-          </a:xfrm>
-          <a:prstGeom prst="rect">
-            <a:avLst/>
-          </a:prstGeom>
-          <a:solidFill>
-            <a:srgbClr val="2669E6"/>
-          </a:solidFill>
-          <a:ln>
-            <a:noFill/>
-          </a:ln>
-        </p:spPr>
-        <p:style>
-          <a:lnRef idx="1">
-            <a:schemeClr val="accent1"/>
-          </a:lnRef>
-          <a:fillRef idx="3">
-            <a:schemeClr val="accent1"/>
-          </a:fillRef>
-          <a:effectRef idx="2">
-            <a:schemeClr val="accent1"/>
-          </a:effectRef>
-          <a:fontRef idx="minor">
-            <a:schemeClr val="lt1"/>
-          </a:fontRef>
-        </p:style>
-        <p:txBody>
-          <a:bodyPr rtlCol="0" anchor="ctr"/>
-          <a:lstStyle/>
-          <a:p>
-            <a:pPr algn="ctr"/>
+            <a:endParaRPr/>
           </a:p>
         </p:txBody>
       </p:sp>
@@ -14642,49 +14455,7 @@
           <a:lstStyle/>
           <a:p>
             <a:pPr algn="ctr"/>
-          </a:p>
-        </p:txBody>
-      </p:sp>
-      <p:sp>
-        <p:nvSpPr>
-          <p:cNvPr id="13" name="Rectangle 12"/>
-          <p:cNvSpPr/>
-          <p:nvPr/>
-        </p:nvSpPr>
-        <p:spPr>
-          <a:xfrm>
-            <a:off x="8046720" y="1325880"/>
-            <a:ext cx="54864" cy="4526280"/>
-          </a:xfrm>
-          <a:prstGeom prst="rect">
-            <a:avLst/>
-          </a:prstGeom>
-          <a:solidFill>
-            <a:srgbClr val="33BEDC"/>
-          </a:solidFill>
-          <a:ln>
-            <a:noFill/>
-          </a:ln>
-        </p:spPr>
-        <p:style>
-          <a:lnRef idx="1">
-            <a:schemeClr val="accent1"/>
-          </a:lnRef>
-          <a:fillRef idx="3">
-            <a:schemeClr val="accent1"/>
-          </a:fillRef>
-          <a:effectRef idx="2">
-            <a:schemeClr val="accent1"/>
-          </a:effectRef>
-          <a:fontRef idx="minor">
-            <a:schemeClr val="lt1"/>
-          </a:fontRef>
-        </p:style>
-        <p:txBody>
-          <a:bodyPr rtlCol="0" anchor="ctr"/>
-          <a:lstStyle/>
-          <a:p>
-            <a:pPr algn="ctr"/>
+            <a:endParaRPr/>
           </a:p>
         </p:txBody>
       </p:sp>
@@ -14846,11 +14617,23 @@
   <p:clrMapOvr>
     <a:masterClrMapping/>
   </p:clrMapOvr>
+  <mc:AlternateContent xmlns:mc="http://schemas.openxmlformats.org/markup-compatibility/2006">
+    <mc:Choice xmlns:p159="http://schemas.microsoft.com/office/powerpoint/2015/09/main" Requires="p159">
+      <p:transition>
+        <p159:morph option="byObject"/>
+      </p:transition>
+    </mc:Choice>
+    <mc:Fallback>
+      <p:transition>
+        <p:fade/>
+      </p:transition>
+    </mc:Fallback>
+  </mc:AlternateContent>
 </p:sld>
 </file>
 
 <file path=ppt/slides/slide8.xml><?xml version="1.0" encoding="utf-8"?>
-<p:sld xmlns:a="http://schemas.openxmlformats.org/drawingml/2006/main" xmlns:p="http://schemas.openxmlformats.org/presentationml/2006/main" xmlns:r="http://schemas.openxmlformats.org/officeDocument/2006/relationships">
+<p:sld xmlns:a="http://schemas.openxmlformats.org/drawingml/2006/main" xmlns:r="http://schemas.openxmlformats.org/officeDocument/2006/relationships" xmlns:p="http://schemas.openxmlformats.org/presentationml/2006/main">
   <p:cSld>
     <p:bg>
       <p:bgPr>
@@ -14866,7 +14649,14 @@
         <p:cNvGrpSpPr/>
         <p:nvPr/>
       </p:nvGrpSpPr>
-      <p:grpSpPr/>
+      <p:grpSpPr>
+        <a:xfrm>
+          <a:off x="0" y="0"/>
+          <a:ext cx="0" cy="0"/>
+          <a:chOff x="0" y="0"/>
+          <a:chExt cx="0" cy="0"/>
+        </a:xfrm>
+      </p:grpSpPr>
       <p:sp>
         <p:nvSpPr>
           <p:cNvPr id="2" name="Rectangle 1"/>
@@ -14907,6 +14697,7 @@
           <a:lstStyle/>
           <a:p>
             <a:pPr algn="ctr"/>
+            <a:endParaRPr/>
           </a:p>
         </p:txBody>
       </p:sp>
@@ -14987,49 +14778,7 @@
           <a:lstStyle/>
           <a:p>
             <a:pPr algn="ctr"/>
-          </a:p>
-        </p:txBody>
-      </p:sp>
-      <p:sp>
-        <p:nvSpPr>
-          <p:cNvPr id="5" name="Rectangle 4"/>
-          <p:cNvSpPr/>
-          <p:nvPr/>
-        </p:nvSpPr>
-        <p:spPr>
-          <a:xfrm>
-            <a:off x="640080" y="1234440"/>
-            <a:ext cx="54864" cy="960120"/>
-          </a:xfrm>
-          <a:prstGeom prst="rect">
-            <a:avLst/>
-          </a:prstGeom>
-          <a:solidFill>
-            <a:srgbClr val="2669E6"/>
-          </a:solidFill>
-          <a:ln>
-            <a:noFill/>
-          </a:ln>
-        </p:spPr>
-        <p:style>
-          <a:lnRef idx="1">
-            <a:schemeClr val="accent1"/>
-          </a:lnRef>
-          <a:fillRef idx="3">
-            <a:schemeClr val="accent1"/>
-          </a:fillRef>
-          <a:effectRef idx="2">
-            <a:schemeClr val="accent1"/>
-          </a:effectRef>
-          <a:fontRef idx="minor">
-            <a:schemeClr val="lt1"/>
-          </a:fontRef>
-        </p:style>
-        <p:txBody>
-          <a:bodyPr rtlCol="0" anchor="ctr"/>
-          <a:lstStyle/>
-          <a:p>
-            <a:pPr algn="ctr"/>
+            <a:endParaRPr/>
           </a:p>
         </p:txBody>
       </p:sp>
@@ -15148,49 +14897,7 @@
           <a:lstStyle/>
           <a:p>
             <a:pPr algn="ctr"/>
-          </a:p>
-        </p:txBody>
-      </p:sp>
-      <p:sp>
-        <p:nvSpPr>
-          <p:cNvPr id="9" name="Rectangle 8"/>
-          <p:cNvSpPr/>
-          <p:nvPr/>
-        </p:nvSpPr>
-        <p:spPr>
-          <a:xfrm>
-            <a:off x="4343400" y="1234440"/>
-            <a:ext cx="54864" cy="960120"/>
-          </a:xfrm>
-          <a:prstGeom prst="rect">
-            <a:avLst/>
-          </a:prstGeom>
-          <a:solidFill>
-            <a:srgbClr val="33BEDC"/>
-          </a:solidFill>
-          <a:ln>
-            <a:noFill/>
-          </a:ln>
-        </p:spPr>
-        <p:style>
-          <a:lnRef idx="1">
-            <a:schemeClr val="accent1"/>
-          </a:lnRef>
-          <a:fillRef idx="3">
-            <a:schemeClr val="accent1"/>
-          </a:fillRef>
-          <a:effectRef idx="2">
-            <a:schemeClr val="accent1"/>
-          </a:effectRef>
-          <a:fontRef idx="minor">
-            <a:schemeClr val="lt1"/>
-          </a:fontRef>
-        </p:style>
-        <p:txBody>
-          <a:bodyPr rtlCol="0" anchor="ctr"/>
-          <a:lstStyle/>
-          <a:p>
-            <a:pPr algn="ctr"/>
+            <a:endParaRPr/>
           </a:p>
         </p:txBody>
       </p:sp>
@@ -15309,49 +15016,7 @@
           <a:lstStyle/>
           <a:p>
             <a:pPr algn="ctr"/>
-          </a:p>
-        </p:txBody>
-      </p:sp>
-      <p:sp>
-        <p:nvSpPr>
-          <p:cNvPr id="13" name="Rectangle 12"/>
-          <p:cNvSpPr/>
-          <p:nvPr/>
-        </p:nvSpPr>
-        <p:spPr>
-          <a:xfrm>
-            <a:off x="8046719" y="1234440"/>
-            <a:ext cx="54864" cy="960120"/>
-          </a:xfrm>
-          <a:prstGeom prst="rect">
-            <a:avLst/>
-          </a:prstGeom>
-          <a:solidFill>
-            <a:srgbClr val="2669E6"/>
-          </a:solidFill>
-          <a:ln>
-            <a:noFill/>
-          </a:ln>
-        </p:spPr>
-        <p:style>
-          <a:lnRef idx="1">
-            <a:schemeClr val="accent1"/>
-          </a:lnRef>
-          <a:fillRef idx="3">
-            <a:schemeClr val="accent1"/>
-          </a:fillRef>
-          <a:effectRef idx="2">
-            <a:schemeClr val="accent1"/>
-          </a:effectRef>
-          <a:fontRef idx="minor">
-            <a:schemeClr val="lt1"/>
-          </a:fontRef>
-        </p:style>
-        <p:txBody>
-          <a:bodyPr rtlCol="0" anchor="ctr"/>
-          <a:lstStyle/>
-          <a:p>
-            <a:pPr algn="ctr"/>
+            <a:endParaRPr/>
           </a:p>
         </p:txBody>
       </p:sp>
@@ -15470,49 +15135,7 @@
           <a:lstStyle/>
           <a:p>
             <a:pPr algn="ctr"/>
-          </a:p>
-        </p:txBody>
-      </p:sp>
-      <p:sp>
-        <p:nvSpPr>
-          <p:cNvPr id="17" name="Rectangle 16"/>
-          <p:cNvSpPr/>
-          <p:nvPr/>
-        </p:nvSpPr>
-        <p:spPr>
-          <a:xfrm>
-            <a:off x="640080" y="2468880"/>
-            <a:ext cx="54864" cy="960120"/>
-          </a:xfrm>
-          <a:prstGeom prst="rect">
-            <a:avLst/>
-          </a:prstGeom>
-          <a:solidFill>
-            <a:srgbClr val="2669E6"/>
-          </a:solidFill>
-          <a:ln>
-            <a:noFill/>
-          </a:ln>
-        </p:spPr>
-        <p:style>
-          <a:lnRef idx="1">
-            <a:schemeClr val="accent1"/>
-          </a:lnRef>
-          <a:fillRef idx="3">
-            <a:schemeClr val="accent1"/>
-          </a:fillRef>
-          <a:effectRef idx="2">
-            <a:schemeClr val="accent1"/>
-          </a:effectRef>
-          <a:fontRef idx="minor">
-            <a:schemeClr val="lt1"/>
-          </a:fontRef>
-        </p:style>
-        <p:txBody>
-          <a:bodyPr rtlCol="0" anchor="ctr"/>
-          <a:lstStyle/>
-          <a:p>
-            <a:pPr algn="ctr"/>
+            <a:endParaRPr/>
           </a:p>
         </p:txBody>
       </p:sp>
@@ -15631,49 +15254,7 @@
           <a:lstStyle/>
           <a:p>
             <a:pPr algn="ctr"/>
-          </a:p>
-        </p:txBody>
-      </p:sp>
-      <p:sp>
-        <p:nvSpPr>
-          <p:cNvPr id="21" name="Rectangle 20"/>
-          <p:cNvSpPr/>
-          <p:nvPr/>
-        </p:nvSpPr>
-        <p:spPr>
-          <a:xfrm>
-            <a:off x="4343400" y="2468880"/>
-            <a:ext cx="54864" cy="960120"/>
-          </a:xfrm>
-          <a:prstGeom prst="rect">
-            <a:avLst/>
-          </a:prstGeom>
-          <a:solidFill>
-            <a:srgbClr val="33BEDC"/>
-          </a:solidFill>
-          <a:ln>
-            <a:noFill/>
-          </a:ln>
-        </p:spPr>
-        <p:style>
-          <a:lnRef idx="1">
-            <a:schemeClr val="accent1"/>
-          </a:lnRef>
-          <a:fillRef idx="3">
-            <a:schemeClr val="accent1"/>
-          </a:fillRef>
-          <a:effectRef idx="2">
-            <a:schemeClr val="accent1"/>
-          </a:effectRef>
-          <a:fontRef idx="minor">
-            <a:schemeClr val="lt1"/>
-          </a:fontRef>
-        </p:style>
-        <p:txBody>
-          <a:bodyPr rtlCol="0" anchor="ctr"/>
-          <a:lstStyle/>
-          <a:p>
-            <a:pPr algn="ctr"/>
+            <a:endParaRPr/>
           </a:p>
         </p:txBody>
       </p:sp>
@@ -15792,49 +15373,7 @@
           <a:lstStyle/>
           <a:p>
             <a:pPr algn="ctr"/>
-          </a:p>
-        </p:txBody>
-      </p:sp>
-      <p:sp>
-        <p:nvSpPr>
-          <p:cNvPr id="25" name="Rectangle 24"/>
-          <p:cNvSpPr/>
-          <p:nvPr/>
-        </p:nvSpPr>
-        <p:spPr>
-          <a:xfrm>
-            <a:off x="8046719" y="2468880"/>
-            <a:ext cx="54864" cy="960120"/>
-          </a:xfrm>
-          <a:prstGeom prst="rect">
-            <a:avLst/>
-          </a:prstGeom>
-          <a:solidFill>
-            <a:srgbClr val="2669E6"/>
-          </a:solidFill>
-          <a:ln>
-            <a:noFill/>
-          </a:ln>
-        </p:spPr>
-        <p:style>
-          <a:lnRef idx="1">
-            <a:schemeClr val="accent1"/>
-          </a:lnRef>
-          <a:fillRef idx="3">
-            <a:schemeClr val="accent1"/>
-          </a:fillRef>
-          <a:effectRef idx="2">
-            <a:schemeClr val="accent1"/>
-          </a:effectRef>
-          <a:fontRef idx="minor">
-            <a:schemeClr val="lt1"/>
-          </a:fontRef>
-        </p:style>
-        <p:txBody>
-          <a:bodyPr rtlCol="0" anchor="ctr"/>
-          <a:lstStyle/>
-          <a:p>
-            <a:pPr algn="ctr"/>
+            <a:endParaRPr/>
           </a:p>
         </p:txBody>
       </p:sp>
@@ -15953,49 +15492,7 @@
           <a:lstStyle/>
           <a:p>
             <a:pPr algn="ctr"/>
-          </a:p>
-        </p:txBody>
-      </p:sp>
-      <p:sp>
-        <p:nvSpPr>
-          <p:cNvPr id="29" name="Rectangle 28"/>
-          <p:cNvSpPr/>
-          <p:nvPr/>
-        </p:nvSpPr>
-        <p:spPr>
-          <a:xfrm>
-            <a:off x="640080" y="3703320"/>
-            <a:ext cx="54864" cy="960120"/>
-          </a:xfrm>
-          <a:prstGeom prst="rect">
-            <a:avLst/>
-          </a:prstGeom>
-          <a:solidFill>
-            <a:srgbClr val="2669E6"/>
-          </a:solidFill>
-          <a:ln>
-            <a:noFill/>
-          </a:ln>
-        </p:spPr>
-        <p:style>
-          <a:lnRef idx="1">
-            <a:schemeClr val="accent1"/>
-          </a:lnRef>
-          <a:fillRef idx="3">
-            <a:schemeClr val="accent1"/>
-          </a:fillRef>
-          <a:effectRef idx="2">
-            <a:schemeClr val="accent1"/>
-          </a:effectRef>
-          <a:fontRef idx="minor">
-            <a:schemeClr val="lt1"/>
-          </a:fontRef>
-        </p:style>
-        <p:txBody>
-          <a:bodyPr rtlCol="0" anchor="ctr"/>
-          <a:lstStyle/>
-          <a:p>
-            <a:pPr algn="ctr"/>
+            <a:endParaRPr/>
           </a:p>
         </p:txBody>
       </p:sp>
@@ -16114,49 +15611,7 @@
           <a:lstStyle/>
           <a:p>
             <a:pPr algn="ctr"/>
-          </a:p>
-        </p:txBody>
-      </p:sp>
-      <p:sp>
-        <p:nvSpPr>
-          <p:cNvPr id="33" name="Rectangle 32"/>
-          <p:cNvSpPr/>
-          <p:nvPr/>
-        </p:nvSpPr>
-        <p:spPr>
-          <a:xfrm>
-            <a:off x="4343400" y="3703320"/>
-            <a:ext cx="54864" cy="960120"/>
-          </a:xfrm>
-          <a:prstGeom prst="rect">
-            <a:avLst/>
-          </a:prstGeom>
-          <a:solidFill>
-            <a:srgbClr val="33BEDC"/>
-          </a:solidFill>
-          <a:ln>
-            <a:noFill/>
-          </a:ln>
-        </p:spPr>
-        <p:style>
-          <a:lnRef idx="1">
-            <a:schemeClr val="accent1"/>
-          </a:lnRef>
-          <a:fillRef idx="3">
-            <a:schemeClr val="accent1"/>
-          </a:fillRef>
-          <a:effectRef idx="2">
-            <a:schemeClr val="accent1"/>
-          </a:effectRef>
-          <a:fontRef idx="minor">
-            <a:schemeClr val="lt1"/>
-          </a:fontRef>
-        </p:style>
-        <p:txBody>
-          <a:bodyPr rtlCol="0" anchor="ctr"/>
-          <a:lstStyle/>
-          <a:p>
-            <a:pPr algn="ctr"/>
+            <a:endParaRPr/>
           </a:p>
         </p:txBody>
       </p:sp>
@@ -16275,49 +15730,7 @@
           <a:lstStyle/>
           <a:p>
             <a:pPr algn="ctr"/>
-          </a:p>
-        </p:txBody>
-      </p:sp>
-      <p:sp>
-        <p:nvSpPr>
-          <p:cNvPr id="37" name="Rectangle 36"/>
-          <p:cNvSpPr/>
-          <p:nvPr/>
-        </p:nvSpPr>
-        <p:spPr>
-          <a:xfrm>
-            <a:off x="8046719" y="3703320"/>
-            <a:ext cx="54864" cy="960120"/>
-          </a:xfrm>
-          <a:prstGeom prst="rect">
-            <a:avLst/>
-          </a:prstGeom>
-          <a:solidFill>
-            <a:srgbClr val="2669E6"/>
-          </a:solidFill>
-          <a:ln>
-            <a:noFill/>
-          </a:ln>
-        </p:spPr>
-        <p:style>
-          <a:lnRef idx="1">
-            <a:schemeClr val="accent1"/>
-          </a:lnRef>
-          <a:fillRef idx="3">
-            <a:schemeClr val="accent1"/>
-          </a:fillRef>
-          <a:effectRef idx="2">
-            <a:schemeClr val="accent1"/>
-          </a:effectRef>
-          <a:fontRef idx="minor">
-            <a:schemeClr val="lt1"/>
-          </a:fontRef>
-        </p:style>
-        <p:txBody>
-          <a:bodyPr rtlCol="0" anchor="ctr"/>
-          <a:lstStyle/>
-          <a:p>
-            <a:pPr algn="ctr"/>
+            <a:endParaRPr/>
           </a:p>
         </p:txBody>
       </p:sp>
@@ -16436,49 +15849,7 @@
           <a:lstStyle/>
           <a:p>
             <a:pPr algn="ctr"/>
-          </a:p>
-        </p:txBody>
-      </p:sp>
-      <p:sp>
-        <p:nvSpPr>
-          <p:cNvPr id="41" name="Rectangle 40"/>
-          <p:cNvSpPr/>
-          <p:nvPr/>
-        </p:nvSpPr>
-        <p:spPr>
-          <a:xfrm>
-            <a:off x="640080" y="4937760"/>
-            <a:ext cx="54864" cy="960120"/>
-          </a:xfrm>
-          <a:prstGeom prst="rect">
-            <a:avLst/>
-          </a:prstGeom>
-          <a:solidFill>
-            <a:srgbClr val="2669E6"/>
-          </a:solidFill>
-          <a:ln>
-            <a:noFill/>
-          </a:ln>
-        </p:spPr>
-        <p:style>
-          <a:lnRef idx="1">
-            <a:schemeClr val="accent1"/>
-          </a:lnRef>
-          <a:fillRef idx="3">
-            <a:schemeClr val="accent1"/>
-          </a:fillRef>
-          <a:effectRef idx="2">
-            <a:schemeClr val="accent1"/>
-          </a:effectRef>
-          <a:fontRef idx="minor">
-            <a:schemeClr val="lt1"/>
-          </a:fontRef>
-        </p:style>
-        <p:txBody>
-          <a:bodyPr rtlCol="0" anchor="ctr"/>
-          <a:lstStyle/>
-          <a:p>
-            <a:pPr algn="ctr"/>
+            <a:endParaRPr/>
           </a:p>
         </p:txBody>
       </p:sp>
@@ -16597,49 +15968,7 @@
           <a:lstStyle/>
           <a:p>
             <a:pPr algn="ctr"/>
-          </a:p>
-        </p:txBody>
-      </p:sp>
-      <p:sp>
-        <p:nvSpPr>
-          <p:cNvPr id="45" name="Rectangle 44"/>
-          <p:cNvSpPr/>
-          <p:nvPr/>
-        </p:nvSpPr>
-        <p:spPr>
-          <a:xfrm>
-            <a:off x="4343400" y="4937760"/>
-            <a:ext cx="54864" cy="960120"/>
-          </a:xfrm>
-          <a:prstGeom prst="rect">
-            <a:avLst/>
-          </a:prstGeom>
-          <a:solidFill>
-            <a:srgbClr val="33BEDC"/>
-          </a:solidFill>
-          <a:ln>
-            <a:noFill/>
-          </a:ln>
-        </p:spPr>
-        <p:style>
-          <a:lnRef idx="1">
-            <a:schemeClr val="accent1"/>
-          </a:lnRef>
-          <a:fillRef idx="3">
-            <a:schemeClr val="accent1"/>
-          </a:fillRef>
-          <a:effectRef idx="2">
-            <a:schemeClr val="accent1"/>
-          </a:effectRef>
-          <a:fontRef idx="minor">
-            <a:schemeClr val="lt1"/>
-          </a:fontRef>
-        </p:style>
-        <p:txBody>
-          <a:bodyPr rtlCol="0" anchor="ctr"/>
-          <a:lstStyle/>
-          <a:p>
-            <a:pPr algn="ctr"/>
+            <a:endParaRPr/>
           </a:p>
         </p:txBody>
       </p:sp>
@@ -16756,11 +16085,23 @@
   <p:clrMapOvr>
     <a:masterClrMapping/>
   </p:clrMapOvr>
+  <mc:AlternateContent xmlns:mc="http://schemas.openxmlformats.org/markup-compatibility/2006">
+    <mc:Choice xmlns:p159="http://schemas.microsoft.com/office/powerpoint/2015/09/main" Requires="p159">
+      <p:transition>
+        <p159:morph option="byObject"/>
+      </p:transition>
+    </mc:Choice>
+    <mc:Fallback>
+      <p:transition>
+        <p:fade/>
+      </p:transition>
+    </mc:Fallback>
+  </mc:AlternateContent>
 </p:sld>
 </file>
 
 <file path=ppt/slides/slide9.xml><?xml version="1.0" encoding="utf-8"?>
-<p:sld xmlns:a="http://schemas.openxmlformats.org/drawingml/2006/main" xmlns:p="http://schemas.openxmlformats.org/presentationml/2006/main" xmlns:r="http://schemas.openxmlformats.org/officeDocument/2006/relationships">
+<p:sld xmlns:a="http://schemas.openxmlformats.org/drawingml/2006/main" xmlns:r="http://schemas.openxmlformats.org/officeDocument/2006/relationships" xmlns:p="http://schemas.openxmlformats.org/presentationml/2006/main">
   <p:cSld>
     <p:bg>
       <p:bgPr>
@@ -16776,7 +16117,14 @@
         <p:cNvGrpSpPr/>
         <p:nvPr/>
       </p:nvGrpSpPr>
-      <p:grpSpPr/>
+      <p:grpSpPr>
+        <a:xfrm>
+          <a:off x="0" y="0"/>
+          <a:ext cx="0" cy="0"/>
+          <a:chOff x="0" y="0"/>
+          <a:chExt cx="0" cy="0"/>
+        </a:xfrm>
+      </p:grpSpPr>
       <p:sp>
         <p:nvSpPr>
           <p:cNvPr id="2" name="Rectangle 1"/>
@@ -16817,6 +16165,7 @@
           <a:lstStyle/>
           <a:p>
             <a:pPr algn="ctr"/>
+            <a:endParaRPr/>
           </a:p>
         </p:txBody>
       </p:sp>
@@ -16897,6 +16246,7 @@
           <a:lstStyle/>
           <a:p>
             <a:pPr algn="ctr"/>
+            <a:endParaRPr/>
           </a:p>
         </p:txBody>
       </p:sp>
@@ -16940,6 +16290,7 @@
           <a:lstStyle/>
           <a:p>
             <a:pPr algn="ctr"/>
+            <a:endParaRPr/>
           </a:p>
         </p:txBody>
       </p:sp>
@@ -17118,6 +16469,7 @@
           <a:lstStyle/>
           <a:p>
             <a:pPr algn="ctr"/>
+            <a:endParaRPr/>
           </a:p>
         </p:txBody>
       </p:sp>
@@ -17161,6 +16513,7 @@
           <a:lstStyle/>
           <a:p>
             <a:pPr algn="ctr"/>
+            <a:endParaRPr/>
           </a:p>
         </p:txBody>
       </p:sp>
@@ -17357,6 +16710,18 @@
   <p:clrMapOvr>
     <a:masterClrMapping/>
   </p:clrMapOvr>
+  <mc:AlternateContent xmlns:mc="http://schemas.openxmlformats.org/markup-compatibility/2006">
+    <mc:Choice xmlns:p159="http://schemas.microsoft.com/office/powerpoint/2015/09/main" Requires="p159">
+      <p:transition>
+        <p159:morph option="byObject"/>
+      </p:transition>
+    </mc:Choice>
+    <mc:Fallback>
+      <p:transition>
+        <p:fade/>
+      </p:transition>
+    </mc:Fallback>
+  </mc:AlternateContent>
 </p:sld>
 </file>
 
